--- a/documents/proposals/v-link-battle_proposal.pptx
+++ b/documents/proposals/v-link-battle_proposal.pptx
@@ -2,18 +2,18 @@
 <file path=ppt/presentation.xml><?xml version="1.0" encoding="utf-8"?>
 <p:presentation xmlns:p="http://schemas.openxmlformats.org/presentationml/2006/main">
   <p:sldMasterIdLst>
-    <p:sldMasterId xmlns:r="http://schemas.openxmlformats.org/officeDocument/2006/relationships" id="2147483648" r:id="R122a885c6a6742ed"/>
+    <p:sldMasterId xmlns:r="http://schemas.openxmlformats.org/officeDocument/2006/relationships" id="2147483648" r:id="R9d97829608f6431f"/>
   </p:sldMasterIdLst>
   <p:notesMasterIdLst>
-    <p:notesMasterId xmlns:r="http://schemas.openxmlformats.org/officeDocument/2006/relationships" r:id="Rd69e806ad6e84bee"/>
+    <p:notesMasterId xmlns:r="http://schemas.openxmlformats.org/officeDocument/2006/relationships" r:id="Re273fa8ecba449b3"/>
   </p:notesMasterIdLst>
   <p:sldIdLst>
-    <p:sldId xmlns:r="http://schemas.openxmlformats.org/officeDocument/2006/relationships" id="256" r:id="R23a84e428eb3431d"/>
-    <p:sldId xmlns:r="http://schemas.openxmlformats.org/officeDocument/2006/relationships" id="257" r:id="Rfd535751bc8c463f"/>
-    <p:sldId xmlns:r="http://schemas.openxmlformats.org/officeDocument/2006/relationships" id="258" r:id="Rba0076496e664abb"/>
-    <p:sldId xmlns:r="http://schemas.openxmlformats.org/officeDocument/2006/relationships" id="259" r:id="R63f8f65c89a9497c"/>
-    <p:sldId xmlns:r="http://schemas.openxmlformats.org/officeDocument/2006/relationships" id="260" r:id="R8b889f6ba43149d8"/>
-    <p:sldId xmlns:r="http://schemas.openxmlformats.org/officeDocument/2006/relationships" id="261" r:id="R9a34cb8048dc4fc0"/>
+    <p:sldId xmlns:r="http://schemas.openxmlformats.org/officeDocument/2006/relationships" id="256" r:id="Ra6886030f4e1496c"/>
+    <p:sldId xmlns:r="http://schemas.openxmlformats.org/officeDocument/2006/relationships" id="257" r:id="R40f9494ad0ae4107"/>
+    <p:sldId xmlns:r="http://schemas.openxmlformats.org/officeDocument/2006/relationships" id="258" r:id="R844c37e9cb8648d9"/>
+    <p:sldId xmlns:r="http://schemas.openxmlformats.org/officeDocument/2006/relationships" id="259" r:id="R9fc2fbf5c77c4587"/>
+    <p:sldId xmlns:r="http://schemas.openxmlformats.org/officeDocument/2006/relationships" id="260" r:id="Rdc9cfd5b5e2f4220"/>
+    <p:sldId xmlns:r="http://schemas.openxmlformats.org/officeDocument/2006/relationships" id="261" r:id="R0b7b8b5ba73642db"/>
   </p:sldIdLst>
   <p:sldSz cx="12192000" cy="6858000"/>
   <p:notesSz cx="6858000" cy="9144000"/>
@@ -462,7 +462,7 @@
           </a:p>
           <a:p xmlns:a="http://schemas.openxmlformats.org/drawingml/2006/main">
             <a:r>
-              <a:t>実演映像：D:/自作ゲーム動画/アピール.mov、コメント機能.mov、タブ.mov</a:t>
+              <a:t>掲載映像：files/Vlinkvideo.mp4（対戦24秒、コメント30秒、キャラクター選択12秒）</a:t>
             </a:r>
           </a:p>
           <a:p xmlns:a="http://schemas.openxmlformats.org/drawingml/2006/main">
@@ -557,7 +557,7 @@
           </a:p>
           <a:p xmlns:a="http://schemas.openxmlformats.org/drawingml/2006/main">
             <a:r>
-              <a:t>実演映像：D:/自作ゲーム動画/アピール.mov、コメント機能.mov、タブ.mov</a:t>
+              <a:t>掲載映像：files/Vlinkvideo.mp4（対戦24秒、コメント30秒、キャラクター選択12秒）</a:t>
             </a:r>
           </a:p>
           <a:p xmlns:a="http://schemas.openxmlformats.org/drawingml/2006/main">
@@ -652,7 +652,7 @@
           </a:p>
           <a:p xmlns:a="http://schemas.openxmlformats.org/drawingml/2006/main">
             <a:r>
-              <a:t>実演映像：D:/自作ゲーム動画/アピール.mov、コメント機能.mov、タブ.mov</a:t>
+              <a:t>掲載映像：files/Vlinkvideo.mp4（対戦24秒、コメント30秒、キャラクター選択12秒）</a:t>
             </a:r>
           </a:p>
           <a:p xmlns:a="http://schemas.openxmlformats.org/drawingml/2006/main">
@@ -747,7 +747,7 @@
           </a:p>
           <a:p xmlns:a="http://schemas.openxmlformats.org/drawingml/2006/main">
             <a:r>
-              <a:t>実演映像：D:/自作ゲーム動画/アピール.mov、コメント機能.mov、タブ.mov</a:t>
+              <a:t>掲載映像：files/Vlinkvideo.mp4（対戦24秒、コメント30秒、キャラクター選択12秒）</a:t>
             </a:r>
           </a:p>
           <a:p xmlns:a="http://schemas.openxmlformats.org/drawingml/2006/main">
@@ -842,7 +842,7 @@
           </a:p>
           <a:p xmlns:a="http://schemas.openxmlformats.org/drawingml/2006/main">
             <a:r>
-              <a:t>実演映像：D:/自作ゲーム動画/アピール.mov、コメント機能.mov、タブ.mov</a:t>
+              <a:t>掲載映像：files/Vlinkvideo.mp4（対戦24秒、コメント30秒、キャラクター選択12秒）</a:t>
             </a:r>
           </a:p>
           <a:p xmlns:a="http://schemas.openxmlformats.org/drawingml/2006/main">
@@ -937,7 +937,7 @@
           </a:p>
           <a:p xmlns:a="http://schemas.openxmlformats.org/drawingml/2006/main">
             <a:r>
-              <a:t>実演映像：D:/自作ゲーム動画/アピール.mov、コメント機能.mov、タブ.mov</a:t>
+              <a:t>掲載映像：files/Vlinkvideo.mp4（対戦24秒、コメント30秒、キャラクター選択12秒）</a:t>
             </a:r>
           </a:p>
           <a:p xmlns:a="http://schemas.openxmlformats.org/drawingml/2006/main">
@@ -994,7 +994,7 @@
           <p:cNvPr id="3" name="Title">
             <a:extLst xmlns:a="http://schemas.openxmlformats.org/drawingml/2006/main">
               <a:ext uri="{FF2B5EF4-FFF2-40B4-BE49-F238E27FC236}">
-                <a16:creationId xmlns:a16="http://schemas.microsoft.com/office/drawing/2014/main" id="{10FF2205-F6DA-4F3A-944E-F751095B8C7D}"/>
+                <a16:creationId xmlns:a16="http://schemas.microsoft.com/office/drawing/2014/main" id="{94F17FCE-C99C-4136-A6FC-4CE1787F34E7}"/>
               </a:ext>
             </a:extLst>
           </p:cNvPr>
@@ -1223,7 +1223,7 @@
           <p:cNvPr id="2" name="Subtitle">
             <a:extLst xmlns:a="http://schemas.openxmlformats.org/drawingml/2006/main">
               <a:ext uri="{FF2B5EF4-FFF2-40B4-BE49-F238E27FC236}">
-                <a16:creationId xmlns:a16="http://schemas.microsoft.com/office/drawing/2014/main" id="{4EF999DD-B262-4D95-B556-62C9BA3099FE}"/>
+                <a16:creationId xmlns:a16="http://schemas.microsoft.com/office/drawing/2014/main" id="{E5631469-A368-468F-9571-5E3F39D7A9B9}"/>
               </a:ext>
             </a:extLst>
           </p:cNvPr>
@@ -1469,7 +1469,7 @@
           <p:cNvPr id="2" name="Section title">
             <a:extLst xmlns:a="http://schemas.openxmlformats.org/drawingml/2006/main">
               <a:ext uri="{FF2B5EF4-FFF2-40B4-BE49-F238E27FC236}">
-                <a16:creationId xmlns:a16="http://schemas.microsoft.com/office/drawing/2014/main" id="{A7224D98-74E1-4DF2-85F5-3AC369CB7459}"/>
+                <a16:creationId xmlns:a16="http://schemas.microsoft.com/office/drawing/2014/main" id="{38CA4838-46A3-4D32-BB0F-BAEF8C36C74F}"/>
               </a:ext>
             </a:extLst>
           </p:cNvPr>
@@ -1715,7 +1715,7 @@
           <p:cNvPr id="3" name="Title">
             <a:extLst xmlns:a="http://schemas.openxmlformats.org/drawingml/2006/main">
               <a:ext uri="{FF2B5EF4-FFF2-40B4-BE49-F238E27FC236}">
-                <a16:creationId xmlns:a16="http://schemas.microsoft.com/office/drawing/2014/main" id="{84E130A0-6F3A-4FE5-AD1C-F6C186B23630}"/>
+                <a16:creationId xmlns:a16="http://schemas.microsoft.com/office/drawing/2014/main" id="{0AB199F7-D166-44E7-AE9E-322C363FB1EB}"/>
               </a:ext>
             </a:extLst>
           </p:cNvPr>
@@ -1944,7 +1944,7 @@
           <p:cNvPr id="2" name="Body">
             <a:extLst xmlns:a="http://schemas.openxmlformats.org/drawingml/2006/main">
               <a:ext uri="{FF2B5EF4-FFF2-40B4-BE49-F238E27FC236}">
-                <a16:creationId xmlns:a16="http://schemas.microsoft.com/office/drawing/2014/main" id="{16E7DB23-DFF9-4E9F-8E26-CBC865360CB9}"/>
+                <a16:creationId xmlns:a16="http://schemas.microsoft.com/office/drawing/2014/main" id="{C6E96114-FF96-47E9-AADB-4C01D7E48054}"/>
               </a:ext>
             </a:extLst>
           </p:cNvPr>
@@ -2190,7 +2190,7 @@
           <p:cNvPr id="4" name="Title">
             <a:extLst xmlns:a="http://schemas.openxmlformats.org/drawingml/2006/main">
               <a:ext uri="{FF2B5EF4-FFF2-40B4-BE49-F238E27FC236}">
-                <a16:creationId xmlns:a16="http://schemas.microsoft.com/office/drawing/2014/main" id="{68202B5F-752C-4F6E-B2AE-6D0885A61854}"/>
+                <a16:creationId xmlns:a16="http://schemas.microsoft.com/office/drawing/2014/main" id="{A568DEEB-07C6-499A-9417-0412C4F58B92}"/>
               </a:ext>
             </a:extLst>
           </p:cNvPr>
@@ -2419,7 +2419,7 @@
           <p:cNvPr id="2" name="Left column">
             <a:extLst xmlns:a="http://schemas.openxmlformats.org/drawingml/2006/main">
               <a:ext uri="{FF2B5EF4-FFF2-40B4-BE49-F238E27FC236}">
-                <a16:creationId xmlns:a16="http://schemas.microsoft.com/office/drawing/2014/main" id="{6262677C-9E9A-44C2-ACBF-AC0BAFD0E6DA}"/>
+                <a16:creationId xmlns:a16="http://schemas.microsoft.com/office/drawing/2014/main" id="{46E4C47F-9F92-4BFA-8DEF-AF7E6B1295E5}"/>
               </a:ext>
             </a:extLst>
           </p:cNvPr>
@@ -2648,7 +2648,7 @@
           <p:cNvPr id="3" name="Right column">
             <a:extLst xmlns:a="http://schemas.openxmlformats.org/drawingml/2006/main">
               <a:ext uri="{FF2B5EF4-FFF2-40B4-BE49-F238E27FC236}">
-                <a16:creationId xmlns:a16="http://schemas.microsoft.com/office/drawing/2014/main" id="{46DA538D-9992-402C-AB59-0275AB143F28}"/>
+                <a16:creationId xmlns:a16="http://schemas.microsoft.com/office/drawing/2014/main" id="{702B06D9-8D8A-4819-9A71-D28452808616}"/>
               </a:ext>
             </a:extLst>
           </p:cNvPr>
@@ -2894,7 +2894,7 @@
           <p:cNvPr id="3" name="Title">
             <a:extLst xmlns:a="http://schemas.openxmlformats.org/drawingml/2006/main">
               <a:ext uri="{FF2B5EF4-FFF2-40B4-BE49-F238E27FC236}">
-                <a16:creationId xmlns:a16="http://schemas.microsoft.com/office/drawing/2014/main" id="{9210AA44-7160-4E45-8754-9CEA8F634D83}"/>
+                <a16:creationId xmlns:a16="http://schemas.microsoft.com/office/drawing/2014/main" id="{578201A4-B73F-4F9A-85FB-F414A704C08C}"/>
               </a:ext>
             </a:extLst>
           </p:cNvPr>
@@ -3123,7 +3123,7 @@
           <p:cNvPr id="2" name="Left column">
             <a:extLst xmlns:a="http://schemas.openxmlformats.org/drawingml/2006/main">
               <a:ext uri="{FF2B5EF4-FFF2-40B4-BE49-F238E27FC236}">
-                <a16:creationId xmlns:a16="http://schemas.microsoft.com/office/drawing/2014/main" id="{D8DB108C-E18A-456C-9804-421328A5CE42}"/>
+                <a16:creationId xmlns:a16="http://schemas.microsoft.com/office/drawing/2014/main" id="{D688AE78-8A6B-413B-B22C-D9E354923518}"/>
               </a:ext>
             </a:extLst>
           </p:cNvPr>
@@ -3390,12 +3390,12 @@
   </p:cSld>
   <p:clrMap bg1="lt1" tx1="dk1" bg2="lt2" tx2="dk2" accent1="accent1" accent2="accent2" accent3="accent3" accent4="accent4" accent5="accent5" accent6="accent6" hlink="hlink" folHlink="folHlink"/>
   <p:sldLayoutIdLst>
-    <p:sldLayoutId xmlns:r="http://schemas.openxmlformats.org/officeDocument/2006/relationships" id="2147483649" r:id="R8ebdee510b3a431b"/>
-    <p:sldLayoutId xmlns:r="http://schemas.openxmlformats.org/officeDocument/2006/relationships" id="2147483650" r:id="R577a31eca04a494d"/>
-    <p:sldLayoutId xmlns:r="http://schemas.openxmlformats.org/officeDocument/2006/relationships" id="2147483651" r:id="Rfaa67c5f7f7b4b8e"/>
-    <p:sldLayoutId xmlns:r="http://schemas.openxmlformats.org/officeDocument/2006/relationships" id="2147483652" r:id="R047f0cc5d1dc4c7e"/>
-    <p:sldLayoutId xmlns:r="http://schemas.openxmlformats.org/officeDocument/2006/relationships" id="2147483653" r:id="R28bde3323c8b473b"/>
-    <p:sldLayoutId xmlns:r="http://schemas.openxmlformats.org/officeDocument/2006/relationships" id="2147483654" r:id="Rf8a2f53957404848"/>
+    <p:sldLayoutId xmlns:r="http://schemas.openxmlformats.org/officeDocument/2006/relationships" id="2147483649" r:id="R04afc0e8620a4c91"/>
+    <p:sldLayoutId xmlns:r="http://schemas.openxmlformats.org/officeDocument/2006/relationships" id="2147483650" r:id="Rb1b9230c910a4667"/>
+    <p:sldLayoutId xmlns:r="http://schemas.openxmlformats.org/officeDocument/2006/relationships" id="2147483651" r:id="R9eb11b63657e4290"/>
+    <p:sldLayoutId xmlns:r="http://schemas.openxmlformats.org/officeDocument/2006/relationships" id="2147483652" r:id="Rf773ca14a8e942bf"/>
+    <p:sldLayoutId xmlns:r="http://schemas.openxmlformats.org/officeDocument/2006/relationships" id="2147483653" r:id="Rbc91cef700274f6c"/>
+    <p:sldLayoutId xmlns:r="http://schemas.openxmlformats.org/officeDocument/2006/relationships" id="2147483654" r:id="R0919950921ae4bcd"/>
   </p:sldLayoutIdLst>
   <p:txStyles>
     <p:titleStyle>
@@ -3943,10 +3943,10 @@
       </p:grpSpPr>
       <p:sp>
         <p:nvSpPr>
-          <p:cNvPr id="9" name="V-Link Battle">
+          <p:cNvPr id="7" name="V-Link Battle">
             <a:extLst xmlns:a="http://schemas.openxmlformats.org/drawingml/2006/main">
               <a:ext uri="{FF2B5EF4-FFF2-40B4-BE49-F238E27FC236}">
-                <a16:creationId xmlns:a16="http://schemas.microsoft.com/office/drawing/2014/main" id="{335E4FF5-FEF0-4FBA-AB5B-421BA1050662}"/>
+                <a16:creationId xmlns:a16="http://schemas.microsoft.com/office/drawing/2014/main" id="{F5653742-54AC-433C-8E83-EC347E215FF3}"/>
               </a:ext>
             </a:extLst>
           </p:cNvPr>
@@ -4108,7 +4108,7 @@
           <p:cNvPr id="2" name="VTuberの配信文化を題材にした3D対戦アクション">
             <a:extLst xmlns:a="http://schemas.openxmlformats.org/drawingml/2006/main">
               <a:ext uri="{FF2B5EF4-FFF2-40B4-BE49-F238E27FC236}">
-                <a16:creationId xmlns:a16="http://schemas.microsoft.com/office/drawing/2014/main" id="{6405B95D-AF62-4FE4-AB3C-2DFB3201C4A3}"/>
+                <a16:creationId xmlns:a16="http://schemas.microsoft.com/office/drawing/2014/main" id="{D329AF05-0EF8-495A-8F5F-0EDB1BA57D2E}"/>
               </a:ext>
             </a:extLst>
           </p:cNvPr>
@@ -4265,336 +4265,12 @@
           </a:p>
         </p:txBody>
       </p:sp>
-      <p:sp>
-        <p:nvSpPr>
-          <p:cNvPr id="3" name="V-Link Battle / 企画書">
+      <p:pic>
+        <p:nvPicPr>
+          <p:cNvPr id="3" name="">
             <a:extLst xmlns:a="http://schemas.openxmlformats.org/drawingml/2006/main">
               <a:ext uri="{FF2B5EF4-FFF2-40B4-BE49-F238E27FC236}">
-                <a16:creationId xmlns:a16="http://schemas.microsoft.com/office/drawing/2014/main" id="{BD599D8A-C307-457B-8A2D-771BA50CA612}"/>
-              </a:ext>
-            </a:extLst>
-          </p:cNvPr>
-          <p:cNvSpPr>
-            <a:spLocks xmlns:a="http://schemas.openxmlformats.org/drawingml/2006/main" noGrp="1"/>
-          </p:cNvSpPr>
-          <p:nvPr/>
-        </p:nvSpPr>
-        <p:spPr>
-          <a:xfrm xmlns:a="http://schemas.openxmlformats.org/drawingml/2006/main">
-            <a:off x="609600" y="6448425"/>
-            <a:ext cx="9525000" cy="247650"/>
-          </a:xfrm>
-          <a:prstGeom xmlns:a="http://schemas.openxmlformats.org/drawingml/2006/main" prst="rect">
-            <a:avLst/>
-          </a:prstGeom>
-          <a:noFill xmlns:a="http://schemas.openxmlformats.org/drawingml/2006/main"/>
-          <a:ln xmlns:a="http://schemas.openxmlformats.org/drawingml/2006/main" w="0">
-            <a:noFill/>
-          </a:ln>
-        </p:spPr>
-        <p:txBody>
-          <a:bodyPr xmlns:a="http://schemas.openxmlformats.org/drawingml/2006/main" wrap="square" lIns="0" tIns="0" rIns="0" bIns="0" anchor="t">
-            <a:noAutofit/>
-          </a:bodyPr>
-          <a:lstStyle xmlns:a="http://schemas.openxmlformats.org/drawingml/2006/main">
-            <a:defPPr>
-              <a:defRPr sz="1200" b="0">
-                <a:solidFill>
-                  <a:srgbClr val="C5BDCE"/>
-                </a:solidFill>
-                <a:latin typeface="Meiryo"/>
-                <a:ea typeface="Meiryo"/>
-                <a:cs typeface="Meiryo"/>
-              </a:defRPr>
-            </a:defPPr>
-            <a:lvl1pPr>
-              <a:defRPr sz="1200" b="0">
-                <a:solidFill>
-                  <a:srgbClr val="C5BDCE"/>
-                </a:solidFill>
-                <a:latin typeface="Meiryo"/>
-                <a:ea typeface="Meiryo"/>
-                <a:cs typeface="Meiryo"/>
-              </a:defRPr>
-            </a:lvl1pPr>
-            <a:lvl2pPr>
-              <a:defRPr sz="1200" b="0">
-                <a:solidFill>
-                  <a:srgbClr val="C5BDCE"/>
-                </a:solidFill>
-                <a:latin typeface="Meiryo"/>
-                <a:ea typeface="Meiryo"/>
-                <a:cs typeface="Meiryo"/>
-              </a:defRPr>
-            </a:lvl2pPr>
-            <a:lvl3pPr>
-              <a:defRPr sz="1200" b="0">
-                <a:solidFill>
-                  <a:srgbClr val="C5BDCE"/>
-                </a:solidFill>
-                <a:latin typeface="Meiryo"/>
-                <a:ea typeface="Meiryo"/>
-                <a:cs typeface="Meiryo"/>
-              </a:defRPr>
-            </a:lvl3pPr>
-            <a:lvl4pPr>
-              <a:defRPr sz="1200" b="0">
-                <a:solidFill>
-                  <a:srgbClr val="C5BDCE"/>
-                </a:solidFill>
-                <a:latin typeface="Meiryo"/>
-                <a:ea typeface="Meiryo"/>
-                <a:cs typeface="Meiryo"/>
-              </a:defRPr>
-            </a:lvl4pPr>
-            <a:lvl5pPr>
-              <a:defRPr sz="1200" b="0">
-                <a:solidFill>
-                  <a:srgbClr val="C5BDCE"/>
-                </a:solidFill>
-                <a:latin typeface="Meiryo"/>
-                <a:ea typeface="Meiryo"/>
-                <a:cs typeface="Meiryo"/>
-              </a:defRPr>
-            </a:lvl5pPr>
-            <a:lvl6pPr>
-              <a:defRPr sz="1200" b="0">
-                <a:solidFill>
-                  <a:srgbClr val="C5BDCE"/>
-                </a:solidFill>
-                <a:latin typeface="Meiryo"/>
-                <a:ea typeface="Meiryo"/>
-                <a:cs typeface="Meiryo"/>
-              </a:defRPr>
-            </a:lvl6pPr>
-            <a:lvl7pPr>
-              <a:defRPr sz="1200" b="0">
-                <a:solidFill>
-                  <a:srgbClr val="C5BDCE"/>
-                </a:solidFill>
-                <a:latin typeface="Meiryo"/>
-                <a:ea typeface="Meiryo"/>
-                <a:cs typeface="Meiryo"/>
-              </a:defRPr>
-            </a:lvl7pPr>
-            <a:lvl8pPr>
-              <a:defRPr sz="1200" b="0">
-                <a:solidFill>
-                  <a:srgbClr val="C5BDCE"/>
-                </a:solidFill>
-                <a:latin typeface="Meiryo"/>
-                <a:ea typeface="Meiryo"/>
-                <a:cs typeface="Meiryo"/>
-              </a:defRPr>
-            </a:lvl8pPr>
-            <a:lvl9pPr>
-              <a:defRPr sz="1200" b="0">
-                <a:solidFill>
-                  <a:srgbClr val="C5BDCE"/>
-                </a:solidFill>
-                <a:latin typeface="Meiryo"/>
-                <a:ea typeface="Meiryo"/>
-                <a:cs typeface="Meiryo"/>
-              </a:defRPr>
-            </a:lvl9pPr>
-          </a:lstStyle>
-          <a:p xmlns:a="http://schemas.openxmlformats.org/drawingml/2006/main">
-            <a:pPr>
-              <a:lnSpc>
-                <a:spcPct val="118000"/>
-              </a:lnSpc>
-              <a:buNone/>
-              <a:defRPr sz="1200" b="0">
-                <a:solidFill>
-                  <a:srgbClr val="C5BDCE"/>
-                </a:solidFill>
-                <a:latin typeface="Meiryo"/>
-                <a:ea typeface="Meiryo"/>
-                <a:cs typeface="Meiryo"/>
-              </a:defRPr>
-            </a:pPr>
-            <a:r>
-              <a:rPr sz="1200" b="0">
-                <a:solidFill>
-                  <a:srgbClr val="C5BDCE"/>
-                </a:solidFill>
-                <a:latin typeface="Meiryo"/>
-                <a:ea typeface="Meiryo"/>
-                <a:cs typeface="Meiryo"/>
-              </a:rPr>
-              <a:t>V-Link Battle / 企画書</a:t>
-            </a:r>
-          </a:p>
-        </p:txBody>
-      </p:sp>
-      <p:sp>
-        <p:nvSpPr>
-          <p:cNvPr id="4" name="01 / 06">
-            <a:extLst xmlns:a="http://schemas.openxmlformats.org/drawingml/2006/main">
-              <a:ext uri="{FF2B5EF4-FFF2-40B4-BE49-F238E27FC236}">
-                <a16:creationId xmlns:a16="http://schemas.microsoft.com/office/drawing/2014/main" id="{01A8E254-2E83-4C96-A69A-207A33DE1A00}"/>
-              </a:ext>
-            </a:extLst>
-          </p:cNvPr>
-          <p:cNvSpPr>
-            <a:spLocks xmlns:a="http://schemas.openxmlformats.org/drawingml/2006/main" noGrp="1"/>
-          </p:cNvSpPr>
-          <p:nvPr/>
-        </p:nvSpPr>
-        <p:spPr>
-          <a:xfrm xmlns:a="http://schemas.openxmlformats.org/drawingml/2006/main">
-            <a:off x="10668000" y="6448425"/>
-            <a:ext cx="952500" cy="247650"/>
-          </a:xfrm>
-          <a:prstGeom xmlns:a="http://schemas.openxmlformats.org/drawingml/2006/main" prst="rect">
-            <a:avLst/>
-          </a:prstGeom>
-          <a:noFill xmlns:a="http://schemas.openxmlformats.org/drawingml/2006/main"/>
-          <a:ln xmlns:a="http://schemas.openxmlformats.org/drawingml/2006/main" w="0">
-            <a:noFill/>
-          </a:ln>
-        </p:spPr>
-        <p:txBody>
-          <a:bodyPr xmlns:a="http://schemas.openxmlformats.org/drawingml/2006/main" wrap="square" lIns="0" tIns="0" rIns="0" bIns="0" anchor="t">
-            <a:noAutofit/>
-          </a:bodyPr>
-          <a:lstStyle xmlns:a="http://schemas.openxmlformats.org/drawingml/2006/main">
-            <a:defPPr>
-              <a:defRPr sz="1200" b="0">
-                <a:solidFill>
-                  <a:srgbClr val="C5BDCE"/>
-                </a:solidFill>
-                <a:latin typeface="Meiryo"/>
-                <a:ea typeface="Meiryo"/>
-                <a:cs typeface="Meiryo"/>
-              </a:defRPr>
-            </a:defPPr>
-            <a:lvl1pPr>
-              <a:defRPr sz="1200" b="0">
-                <a:solidFill>
-                  <a:srgbClr val="C5BDCE"/>
-                </a:solidFill>
-                <a:latin typeface="Meiryo"/>
-                <a:ea typeface="Meiryo"/>
-                <a:cs typeface="Meiryo"/>
-              </a:defRPr>
-            </a:lvl1pPr>
-            <a:lvl2pPr>
-              <a:defRPr sz="1200" b="0">
-                <a:solidFill>
-                  <a:srgbClr val="C5BDCE"/>
-                </a:solidFill>
-                <a:latin typeface="Meiryo"/>
-                <a:ea typeface="Meiryo"/>
-                <a:cs typeface="Meiryo"/>
-              </a:defRPr>
-            </a:lvl2pPr>
-            <a:lvl3pPr>
-              <a:defRPr sz="1200" b="0">
-                <a:solidFill>
-                  <a:srgbClr val="C5BDCE"/>
-                </a:solidFill>
-                <a:latin typeface="Meiryo"/>
-                <a:ea typeface="Meiryo"/>
-                <a:cs typeface="Meiryo"/>
-              </a:defRPr>
-            </a:lvl3pPr>
-            <a:lvl4pPr>
-              <a:defRPr sz="1200" b="0">
-                <a:solidFill>
-                  <a:srgbClr val="C5BDCE"/>
-                </a:solidFill>
-                <a:latin typeface="Meiryo"/>
-                <a:ea typeface="Meiryo"/>
-                <a:cs typeface="Meiryo"/>
-              </a:defRPr>
-            </a:lvl4pPr>
-            <a:lvl5pPr>
-              <a:defRPr sz="1200" b="0">
-                <a:solidFill>
-                  <a:srgbClr val="C5BDCE"/>
-                </a:solidFill>
-                <a:latin typeface="Meiryo"/>
-                <a:ea typeface="Meiryo"/>
-                <a:cs typeface="Meiryo"/>
-              </a:defRPr>
-            </a:lvl5pPr>
-            <a:lvl6pPr>
-              <a:defRPr sz="1200" b="0">
-                <a:solidFill>
-                  <a:srgbClr val="C5BDCE"/>
-                </a:solidFill>
-                <a:latin typeface="Meiryo"/>
-                <a:ea typeface="Meiryo"/>
-                <a:cs typeface="Meiryo"/>
-              </a:defRPr>
-            </a:lvl6pPr>
-            <a:lvl7pPr>
-              <a:defRPr sz="1200" b="0">
-                <a:solidFill>
-                  <a:srgbClr val="C5BDCE"/>
-                </a:solidFill>
-                <a:latin typeface="Meiryo"/>
-                <a:ea typeface="Meiryo"/>
-                <a:cs typeface="Meiryo"/>
-              </a:defRPr>
-            </a:lvl7pPr>
-            <a:lvl8pPr>
-              <a:defRPr sz="1200" b="0">
-                <a:solidFill>
-                  <a:srgbClr val="C5BDCE"/>
-                </a:solidFill>
-                <a:latin typeface="Meiryo"/>
-                <a:ea typeface="Meiryo"/>
-                <a:cs typeface="Meiryo"/>
-              </a:defRPr>
-            </a:lvl8pPr>
-            <a:lvl9pPr>
-              <a:defRPr sz="1200" b="0">
-                <a:solidFill>
-                  <a:srgbClr val="C5BDCE"/>
-                </a:solidFill>
-                <a:latin typeface="Meiryo"/>
-                <a:ea typeface="Meiryo"/>
-                <a:cs typeface="Meiryo"/>
-              </a:defRPr>
-            </a:lvl9pPr>
-          </a:lstStyle>
-          <a:p xmlns:a="http://schemas.openxmlformats.org/drawingml/2006/main">
-            <a:pPr>
-              <a:lnSpc>
-                <a:spcPct val="118000"/>
-              </a:lnSpc>
-              <a:buNone/>
-              <a:defRPr sz="1200" b="0">
-                <a:solidFill>
-                  <a:srgbClr val="C5BDCE"/>
-                </a:solidFill>
-                <a:latin typeface="Meiryo"/>
-                <a:ea typeface="Meiryo"/>
-                <a:cs typeface="Meiryo"/>
-              </a:defRPr>
-            </a:pPr>
-            <a:r>
-              <a:rPr sz="1200" b="0">
-                <a:solidFill>
-                  <a:srgbClr val="C5BDCE"/>
-                </a:solidFill>
-                <a:latin typeface="Meiryo"/>
-                <a:ea typeface="Meiryo"/>
-                <a:cs typeface="Meiryo"/>
-              </a:rPr>
-              <a:t>01 / 06</a:t>
-            </a:r>
-          </a:p>
-        </p:txBody>
-      </p:sp>
-      <p:pic>
-        <p:nvPicPr>
-          <p:cNvPr id="5" name="">
-            <a:extLst xmlns:a="http://schemas.openxmlformats.org/drawingml/2006/main">
-              <a:ext uri="{FF2B5EF4-FFF2-40B4-BE49-F238E27FC236}">
-                <a16:creationId xmlns:a16="http://schemas.microsoft.com/office/drawing/2014/main" id="{D2E4B0D7-A3F7-4EF2-97DF-A05550F1E67D}"/>
+                <a16:creationId xmlns:a16="http://schemas.microsoft.com/office/drawing/2014/main" id="{BCDDD046-CDCF-4A6D-97DE-BE2FD3ECCE0A}"/>
               </a:ext>
             </a:extLst>
           </p:cNvPr>
@@ -4604,7 +4280,7 @@
           <p:nvPr/>
         </p:nvPicPr>
         <p:blipFill>
-          <a:blip xmlns:r="http://schemas.openxmlformats.org/officeDocument/2006/relationships" xmlns:a="http://schemas.openxmlformats.org/drawingml/2006/main" r:embed="R7262e51f0c1a42dd"/>
+          <a:blip xmlns:r="http://schemas.openxmlformats.org/officeDocument/2006/relationships" xmlns:a="http://schemas.openxmlformats.org/drawingml/2006/main" r:embed="Rc31735a1bfea411f"/>
           <a:stretch xmlns:a="http://schemas.openxmlformats.org/drawingml/2006/main"/>
         </p:blipFill>
         <p:spPr>
@@ -4619,10 +4295,10 @@
       </p:pic>
       <p:sp>
         <p:nvSpPr>
-          <p:cNvPr id="6" name="魅せる行動を、&#10;勝つための&#10;戦略に。">
+          <p:cNvPr id="4" name="魅せる行動を、&#10;勝つための&#10;戦略に。">
             <a:extLst xmlns:a="http://schemas.openxmlformats.org/drawingml/2006/main">
               <a:ext uri="{FF2B5EF4-FFF2-40B4-BE49-F238E27FC236}">
-                <a16:creationId xmlns:a16="http://schemas.microsoft.com/office/drawing/2014/main" id="{8FE7310B-AF15-41CF-8127-861D35084B11}"/>
+                <a16:creationId xmlns:a16="http://schemas.microsoft.com/office/drawing/2014/main" id="{DF09FDED-D229-4F42-B31E-57707E6A6A0F}"/>
               </a:ext>
             </a:extLst>
           </p:cNvPr>
@@ -4835,10 +4511,10 @@
       </p:sp>
       <p:sp>
         <p:nvSpPr>
-          <p:cNvPr id="7" name="攻撃するだけでなく、&#10;相手の隙にアピール。&#10;配信の盛り上がりを&#10;戦いの力">
+          <p:cNvPr id="5" name="攻撃するだけでなく、&#10;相手の隙にアピール。&#10;配信の盛り上がりを&#10;戦いの力">
             <a:extLst xmlns:a="http://schemas.openxmlformats.org/drawingml/2006/main">
               <a:ext uri="{FF2B5EF4-FFF2-40B4-BE49-F238E27FC236}">
-                <a16:creationId xmlns:a16="http://schemas.microsoft.com/office/drawing/2014/main" id="{AA60EE57-0FE6-4E16-8C93-59827FBF133B}"/>
+                <a16:creationId xmlns:a16="http://schemas.microsoft.com/office/drawing/2014/main" id="{B1231FCB-F62D-4DD7-B9FC-CA42458B9E09}"/>
               </a:ext>
             </a:extLst>
           </p:cNvPr>
@@ -5078,10 +4754,10 @@
       </p:sp>
       <p:sp>
         <p:nvSpPr>
-          <p:cNvPr id="8" name="制作人数：8人 / Unity&#10;企画書作成：島本善太">
+          <p:cNvPr id="6" name="制作人数：8人 / Unity&#10;企画書作成：島本善太">
             <a:extLst xmlns:a="http://schemas.openxmlformats.org/drawingml/2006/main">
               <a:ext uri="{FF2B5EF4-FFF2-40B4-BE49-F238E27FC236}">
-                <a16:creationId xmlns:a16="http://schemas.microsoft.com/office/drawing/2014/main" id="{6437A1C2-25B4-405E-93AC-B53C75EA9B1F}"/>
+                <a16:creationId xmlns:a16="http://schemas.microsoft.com/office/drawing/2014/main" id="{BD7B8404-DEA3-440B-AE5F-D675EB1B02B6}"/>
               </a:ext>
             </a:extLst>
           </p:cNvPr>
@@ -5268,7 +4944,7 @@
     </p:spTree>
     <p:extLst>
       <p:ext uri="{BB962C8B-B14F-4D97-AF65-F5344CB8AC3E}">
-        <p14:creationId xmlns:p14="http://schemas.microsoft.com/office/powerpoint/2010/main" val="1956427069"/>
+        <p14:creationId xmlns:p14="http://schemas.microsoft.com/office/powerpoint/2010/main" val="269867377"/>
       </p:ext>
     </p:extLst>
   </p:cSld>
@@ -5296,10 +4972,10 @@
       </p:grpSpPr>
       <p:sp>
         <p:nvSpPr>
-          <p:cNvPr id="11" name="企画の核とプレイヤー体験">
+          <p:cNvPr id="9" name="企画の核とプレイヤー体験">
             <a:extLst xmlns:a="http://schemas.openxmlformats.org/drawingml/2006/main">
               <a:ext uri="{FF2B5EF4-FFF2-40B4-BE49-F238E27FC236}">
-                <a16:creationId xmlns:a16="http://schemas.microsoft.com/office/drawing/2014/main" id="{97E9C7A2-AECE-46CC-A499-13489104553A}"/>
+                <a16:creationId xmlns:a16="http://schemas.microsoft.com/office/drawing/2014/main" id="{01A5B6DB-9502-421C-B172-D3788D32416E}"/>
               </a:ext>
             </a:extLst>
           </p:cNvPr>
@@ -5461,7 +5137,7 @@
           <p:cNvPr id="2" name="対戦の駆け引きに、配信者らしい「見せ場」を加える">
             <a:extLst xmlns:a="http://schemas.openxmlformats.org/drawingml/2006/main">
               <a:ext uri="{FF2B5EF4-FFF2-40B4-BE49-F238E27FC236}">
-                <a16:creationId xmlns:a16="http://schemas.microsoft.com/office/drawing/2014/main" id="{9CC25C03-8D90-435C-B7D7-0CC1B67315CE}"/>
+                <a16:creationId xmlns:a16="http://schemas.microsoft.com/office/drawing/2014/main" id="{E3162E13-C89B-4B0F-A5D2-0B48C308DA3D}"/>
               </a:ext>
             </a:extLst>
           </p:cNvPr>
@@ -5618,336 +5294,12 @@
           </a:p>
         </p:txBody>
       </p:sp>
-      <p:sp>
-        <p:nvSpPr>
-          <p:cNvPr id="3" name="V-Link Battle / 企画書">
+      <p:pic>
+        <p:nvPicPr>
+          <p:cNvPr id="3" name="">
             <a:extLst xmlns:a="http://schemas.openxmlformats.org/drawingml/2006/main">
               <a:ext uri="{FF2B5EF4-FFF2-40B4-BE49-F238E27FC236}">
-                <a16:creationId xmlns:a16="http://schemas.microsoft.com/office/drawing/2014/main" id="{51831DC9-844A-434C-AF77-3FDC4EBE5A7D}"/>
-              </a:ext>
-            </a:extLst>
-          </p:cNvPr>
-          <p:cNvSpPr>
-            <a:spLocks xmlns:a="http://schemas.openxmlformats.org/drawingml/2006/main" noGrp="1"/>
-          </p:cNvSpPr>
-          <p:nvPr/>
-        </p:nvSpPr>
-        <p:spPr>
-          <a:xfrm xmlns:a="http://schemas.openxmlformats.org/drawingml/2006/main">
-            <a:off x="609600" y="6448425"/>
-            <a:ext cx="9525000" cy="247650"/>
-          </a:xfrm>
-          <a:prstGeom xmlns:a="http://schemas.openxmlformats.org/drawingml/2006/main" prst="rect">
-            <a:avLst/>
-          </a:prstGeom>
-          <a:noFill xmlns:a="http://schemas.openxmlformats.org/drawingml/2006/main"/>
-          <a:ln xmlns:a="http://schemas.openxmlformats.org/drawingml/2006/main" w="0">
-            <a:noFill/>
-          </a:ln>
-        </p:spPr>
-        <p:txBody>
-          <a:bodyPr xmlns:a="http://schemas.openxmlformats.org/drawingml/2006/main" wrap="square" lIns="0" tIns="0" rIns="0" bIns="0" anchor="t">
-            <a:noAutofit/>
-          </a:bodyPr>
-          <a:lstStyle xmlns:a="http://schemas.openxmlformats.org/drawingml/2006/main">
-            <a:defPPr>
-              <a:defRPr sz="1200" b="0">
-                <a:solidFill>
-                  <a:srgbClr val="C5BDCE"/>
-                </a:solidFill>
-                <a:latin typeface="Meiryo"/>
-                <a:ea typeface="Meiryo"/>
-                <a:cs typeface="Meiryo"/>
-              </a:defRPr>
-            </a:defPPr>
-            <a:lvl1pPr>
-              <a:defRPr sz="1200" b="0">
-                <a:solidFill>
-                  <a:srgbClr val="C5BDCE"/>
-                </a:solidFill>
-                <a:latin typeface="Meiryo"/>
-                <a:ea typeface="Meiryo"/>
-                <a:cs typeface="Meiryo"/>
-              </a:defRPr>
-            </a:lvl1pPr>
-            <a:lvl2pPr>
-              <a:defRPr sz="1200" b="0">
-                <a:solidFill>
-                  <a:srgbClr val="C5BDCE"/>
-                </a:solidFill>
-                <a:latin typeface="Meiryo"/>
-                <a:ea typeface="Meiryo"/>
-                <a:cs typeface="Meiryo"/>
-              </a:defRPr>
-            </a:lvl2pPr>
-            <a:lvl3pPr>
-              <a:defRPr sz="1200" b="0">
-                <a:solidFill>
-                  <a:srgbClr val="C5BDCE"/>
-                </a:solidFill>
-                <a:latin typeface="Meiryo"/>
-                <a:ea typeface="Meiryo"/>
-                <a:cs typeface="Meiryo"/>
-              </a:defRPr>
-            </a:lvl3pPr>
-            <a:lvl4pPr>
-              <a:defRPr sz="1200" b="0">
-                <a:solidFill>
-                  <a:srgbClr val="C5BDCE"/>
-                </a:solidFill>
-                <a:latin typeface="Meiryo"/>
-                <a:ea typeface="Meiryo"/>
-                <a:cs typeface="Meiryo"/>
-              </a:defRPr>
-            </a:lvl4pPr>
-            <a:lvl5pPr>
-              <a:defRPr sz="1200" b="0">
-                <a:solidFill>
-                  <a:srgbClr val="C5BDCE"/>
-                </a:solidFill>
-                <a:latin typeface="Meiryo"/>
-                <a:ea typeface="Meiryo"/>
-                <a:cs typeface="Meiryo"/>
-              </a:defRPr>
-            </a:lvl5pPr>
-            <a:lvl6pPr>
-              <a:defRPr sz="1200" b="0">
-                <a:solidFill>
-                  <a:srgbClr val="C5BDCE"/>
-                </a:solidFill>
-                <a:latin typeface="Meiryo"/>
-                <a:ea typeface="Meiryo"/>
-                <a:cs typeface="Meiryo"/>
-              </a:defRPr>
-            </a:lvl6pPr>
-            <a:lvl7pPr>
-              <a:defRPr sz="1200" b="0">
-                <a:solidFill>
-                  <a:srgbClr val="C5BDCE"/>
-                </a:solidFill>
-                <a:latin typeface="Meiryo"/>
-                <a:ea typeface="Meiryo"/>
-                <a:cs typeface="Meiryo"/>
-              </a:defRPr>
-            </a:lvl7pPr>
-            <a:lvl8pPr>
-              <a:defRPr sz="1200" b="0">
-                <a:solidFill>
-                  <a:srgbClr val="C5BDCE"/>
-                </a:solidFill>
-                <a:latin typeface="Meiryo"/>
-                <a:ea typeface="Meiryo"/>
-                <a:cs typeface="Meiryo"/>
-              </a:defRPr>
-            </a:lvl8pPr>
-            <a:lvl9pPr>
-              <a:defRPr sz="1200" b="0">
-                <a:solidFill>
-                  <a:srgbClr val="C5BDCE"/>
-                </a:solidFill>
-                <a:latin typeface="Meiryo"/>
-                <a:ea typeface="Meiryo"/>
-                <a:cs typeface="Meiryo"/>
-              </a:defRPr>
-            </a:lvl9pPr>
-          </a:lstStyle>
-          <a:p xmlns:a="http://schemas.openxmlformats.org/drawingml/2006/main">
-            <a:pPr>
-              <a:lnSpc>
-                <a:spcPct val="118000"/>
-              </a:lnSpc>
-              <a:buNone/>
-              <a:defRPr sz="1200" b="0">
-                <a:solidFill>
-                  <a:srgbClr val="C5BDCE"/>
-                </a:solidFill>
-                <a:latin typeface="Meiryo"/>
-                <a:ea typeface="Meiryo"/>
-                <a:cs typeface="Meiryo"/>
-              </a:defRPr>
-            </a:pPr>
-            <a:r>
-              <a:rPr sz="1200" b="0">
-                <a:solidFill>
-                  <a:srgbClr val="C5BDCE"/>
-                </a:solidFill>
-                <a:latin typeface="Meiryo"/>
-                <a:ea typeface="Meiryo"/>
-                <a:cs typeface="Meiryo"/>
-              </a:rPr>
-              <a:t>V-Link Battle / 企画書</a:t>
-            </a:r>
-          </a:p>
-        </p:txBody>
-      </p:sp>
-      <p:sp>
-        <p:nvSpPr>
-          <p:cNvPr id="4" name="02 / 06">
-            <a:extLst xmlns:a="http://schemas.openxmlformats.org/drawingml/2006/main">
-              <a:ext uri="{FF2B5EF4-FFF2-40B4-BE49-F238E27FC236}">
-                <a16:creationId xmlns:a16="http://schemas.microsoft.com/office/drawing/2014/main" id="{D8AD39E5-ED47-4718-8F29-8F5B6B5D25A9}"/>
-              </a:ext>
-            </a:extLst>
-          </p:cNvPr>
-          <p:cNvSpPr>
-            <a:spLocks xmlns:a="http://schemas.openxmlformats.org/drawingml/2006/main" noGrp="1"/>
-          </p:cNvSpPr>
-          <p:nvPr/>
-        </p:nvSpPr>
-        <p:spPr>
-          <a:xfrm xmlns:a="http://schemas.openxmlformats.org/drawingml/2006/main">
-            <a:off x="10668000" y="6448425"/>
-            <a:ext cx="952500" cy="247650"/>
-          </a:xfrm>
-          <a:prstGeom xmlns:a="http://schemas.openxmlformats.org/drawingml/2006/main" prst="rect">
-            <a:avLst/>
-          </a:prstGeom>
-          <a:noFill xmlns:a="http://schemas.openxmlformats.org/drawingml/2006/main"/>
-          <a:ln xmlns:a="http://schemas.openxmlformats.org/drawingml/2006/main" w="0">
-            <a:noFill/>
-          </a:ln>
-        </p:spPr>
-        <p:txBody>
-          <a:bodyPr xmlns:a="http://schemas.openxmlformats.org/drawingml/2006/main" wrap="square" lIns="0" tIns="0" rIns="0" bIns="0" anchor="t">
-            <a:noAutofit/>
-          </a:bodyPr>
-          <a:lstStyle xmlns:a="http://schemas.openxmlformats.org/drawingml/2006/main">
-            <a:defPPr>
-              <a:defRPr sz="1200" b="0">
-                <a:solidFill>
-                  <a:srgbClr val="C5BDCE"/>
-                </a:solidFill>
-                <a:latin typeface="Meiryo"/>
-                <a:ea typeface="Meiryo"/>
-                <a:cs typeface="Meiryo"/>
-              </a:defRPr>
-            </a:defPPr>
-            <a:lvl1pPr>
-              <a:defRPr sz="1200" b="0">
-                <a:solidFill>
-                  <a:srgbClr val="C5BDCE"/>
-                </a:solidFill>
-                <a:latin typeface="Meiryo"/>
-                <a:ea typeface="Meiryo"/>
-                <a:cs typeface="Meiryo"/>
-              </a:defRPr>
-            </a:lvl1pPr>
-            <a:lvl2pPr>
-              <a:defRPr sz="1200" b="0">
-                <a:solidFill>
-                  <a:srgbClr val="C5BDCE"/>
-                </a:solidFill>
-                <a:latin typeface="Meiryo"/>
-                <a:ea typeface="Meiryo"/>
-                <a:cs typeface="Meiryo"/>
-              </a:defRPr>
-            </a:lvl2pPr>
-            <a:lvl3pPr>
-              <a:defRPr sz="1200" b="0">
-                <a:solidFill>
-                  <a:srgbClr val="C5BDCE"/>
-                </a:solidFill>
-                <a:latin typeface="Meiryo"/>
-                <a:ea typeface="Meiryo"/>
-                <a:cs typeface="Meiryo"/>
-              </a:defRPr>
-            </a:lvl3pPr>
-            <a:lvl4pPr>
-              <a:defRPr sz="1200" b="0">
-                <a:solidFill>
-                  <a:srgbClr val="C5BDCE"/>
-                </a:solidFill>
-                <a:latin typeface="Meiryo"/>
-                <a:ea typeface="Meiryo"/>
-                <a:cs typeface="Meiryo"/>
-              </a:defRPr>
-            </a:lvl4pPr>
-            <a:lvl5pPr>
-              <a:defRPr sz="1200" b="0">
-                <a:solidFill>
-                  <a:srgbClr val="C5BDCE"/>
-                </a:solidFill>
-                <a:latin typeface="Meiryo"/>
-                <a:ea typeface="Meiryo"/>
-                <a:cs typeface="Meiryo"/>
-              </a:defRPr>
-            </a:lvl5pPr>
-            <a:lvl6pPr>
-              <a:defRPr sz="1200" b="0">
-                <a:solidFill>
-                  <a:srgbClr val="C5BDCE"/>
-                </a:solidFill>
-                <a:latin typeface="Meiryo"/>
-                <a:ea typeface="Meiryo"/>
-                <a:cs typeface="Meiryo"/>
-              </a:defRPr>
-            </a:lvl6pPr>
-            <a:lvl7pPr>
-              <a:defRPr sz="1200" b="0">
-                <a:solidFill>
-                  <a:srgbClr val="C5BDCE"/>
-                </a:solidFill>
-                <a:latin typeface="Meiryo"/>
-                <a:ea typeface="Meiryo"/>
-                <a:cs typeface="Meiryo"/>
-              </a:defRPr>
-            </a:lvl7pPr>
-            <a:lvl8pPr>
-              <a:defRPr sz="1200" b="0">
-                <a:solidFill>
-                  <a:srgbClr val="C5BDCE"/>
-                </a:solidFill>
-                <a:latin typeface="Meiryo"/>
-                <a:ea typeface="Meiryo"/>
-                <a:cs typeface="Meiryo"/>
-              </a:defRPr>
-            </a:lvl8pPr>
-            <a:lvl9pPr>
-              <a:defRPr sz="1200" b="0">
-                <a:solidFill>
-                  <a:srgbClr val="C5BDCE"/>
-                </a:solidFill>
-                <a:latin typeface="Meiryo"/>
-                <a:ea typeface="Meiryo"/>
-                <a:cs typeface="Meiryo"/>
-              </a:defRPr>
-            </a:lvl9pPr>
-          </a:lstStyle>
-          <a:p xmlns:a="http://schemas.openxmlformats.org/drawingml/2006/main">
-            <a:pPr>
-              <a:lnSpc>
-                <a:spcPct val="118000"/>
-              </a:lnSpc>
-              <a:buNone/>
-              <a:defRPr sz="1200" b="0">
-                <a:solidFill>
-                  <a:srgbClr val="C5BDCE"/>
-                </a:solidFill>
-                <a:latin typeface="Meiryo"/>
-                <a:ea typeface="Meiryo"/>
-                <a:cs typeface="Meiryo"/>
-              </a:defRPr>
-            </a:pPr>
-            <a:r>
-              <a:rPr sz="1200" b="0">
-                <a:solidFill>
-                  <a:srgbClr val="C5BDCE"/>
-                </a:solidFill>
-                <a:latin typeface="Meiryo"/>
-                <a:ea typeface="Meiryo"/>
-                <a:cs typeface="Meiryo"/>
-              </a:rPr>
-              <a:t>02 / 06</a:t>
-            </a:r>
-          </a:p>
-        </p:txBody>
-      </p:sp>
-      <p:pic>
-        <p:nvPicPr>
-          <p:cNvPr id="5" name="">
-            <a:extLst xmlns:a="http://schemas.openxmlformats.org/drawingml/2006/main">
-              <a:ext uri="{FF2B5EF4-FFF2-40B4-BE49-F238E27FC236}">
-                <a16:creationId xmlns:a16="http://schemas.microsoft.com/office/drawing/2014/main" id="{76CA4F2F-6D2C-4C98-9F50-D762E3EF12E7}"/>
+                <a16:creationId xmlns:a16="http://schemas.microsoft.com/office/drawing/2014/main" id="{B50A850F-D3CE-4039-B38B-38BD3EDB7C5E}"/>
               </a:ext>
             </a:extLst>
           </p:cNvPr>
@@ -5957,7 +5309,7 @@
           <p:nvPr/>
         </p:nvPicPr>
         <p:blipFill>
-          <a:blip xmlns:r="http://schemas.openxmlformats.org/officeDocument/2006/relationships" xmlns:a="http://schemas.openxmlformats.org/drawingml/2006/main" r:embed="R0c43b14a606a4eb1"/>
+          <a:blip xmlns:r="http://schemas.openxmlformats.org/officeDocument/2006/relationships" xmlns:a="http://schemas.openxmlformats.org/drawingml/2006/main" r:embed="Re22ce4d987d44bdb"/>
           <a:stretch xmlns:a="http://schemas.openxmlformats.org/drawingml/2006/main"/>
         </p:blipFill>
         <p:spPr>
@@ -5972,10 +5324,10 @@
       </p:pic>
       <p:sp>
         <p:nvSpPr>
-          <p:cNvPr id="6" name="想定するプレイヤー">
+          <p:cNvPr id="4" name="想定するプレイヤー">
             <a:extLst xmlns:a="http://schemas.openxmlformats.org/drawingml/2006/main">
               <a:ext uri="{FF2B5EF4-FFF2-40B4-BE49-F238E27FC236}">
-                <a16:creationId xmlns:a16="http://schemas.microsoft.com/office/drawing/2014/main" id="{66433405-B389-45C6-8BBA-1E7252AAA947}"/>
+                <a16:creationId xmlns:a16="http://schemas.microsoft.com/office/drawing/2014/main" id="{FE8705F8-61FF-49C7-9029-80E06745E856}"/>
               </a:ext>
             </a:extLst>
           </p:cNvPr>
@@ -6134,10 +5486,10 @@
       </p:sp>
       <p:sp>
         <p:nvSpPr>
-          <p:cNvPr id="7" name="VTuberや配信文化に親しみがあり、&#10;相手との読み合いや対戦を楽しみた">
+          <p:cNvPr id="5" name="VTuberや配信文化に親しみがあり、&#10;相手との読み合いや対戦を楽しみた">
             <a:extLst xmlns:a="http://schemas.openxmlformats.org/drawingml/2006/main">
               <a:ext uri="{FF2B5EF4-FFF2-40B4-BE49-F238E27FC236}">
-                <a16:creationId xmlns:a16="http://schemas.microsoft.com/office/drawing/2014/main" id="{BEF3BCDD-385E-4C32-A38E-60540F3EEC97}"/>
+                <a16:creationId xmlns:a16="http://schemas.microsoft.com/office/drawing/2014/main" id="{C4F03212-4623-479F-A032-EC0E626B7162}"/>
               </a:ext>
             </a:extLst>
           </p:cNvPr>
@@ -6323,10 +5675,10 @@
       </p:sp>
       <p:sp>
         <p:nvSpPr>
-          <p:cNvPr id="8" name="基本の遊び">
+          <p:cNvPr id="6" name="基本の遊び">
             <a:extLst xmlns:a="http://schemas.openxmlformats.org/drawingml/2006/main">
               <a:ext uri="{FF2B5EF4-FFF2-40B4-BE49-F238E27FC236}">
-                <a16:creationId xmlns:a16="http://schemas.microsoft.com/office/drawing/2014/main" id="{A1256D00-2F83-4648-9881-3A81DBD58273}"/>
+                <a16:creationId xmlns:a16="http://schemas.microsoft.com/office/drawing/2014/main" id="{103E76B4-FF8F-4990-9DB7-BAD64584ED89}"/>
               </a:ext>
             </a:extLst>
           </p:cNvPr>
@@ -6485,10 +5837,10 @@
       </p:sp>
       <p:sp>
         <p:nvSpPr>
-          <p:cNvPr id="9" name="攻撃・ガード・移動で相手のHPを削る。&#10;そこにアピールを挟み、&#10;次の攻撃">
+          <p:cNvPr id="7" name="攻撃・ガード・移動で相手のHPを削る。&#10;そこにアピールを挟み、&#10;次の攻撃">
             <a:extLst xmlns:a="http://schemas.openxmlformats.org/drawingml/2006/main">
               <a:ext uri="{FF2B5EF4-FFF2-40B4-BE49-F238E27FC236}">
-                <a16:creationId xmlns:a16="http://schemas.microsoft.com/office/drawing/2014/main" id="{E6815499-B851-4B5D-AAEE-76BF7CB77B83}"/>
+                <a16:creationId xmlns:a16="http://schemas.microsoft.com/office/drawing/2014/main" id="{D9401E1C-DCDE-4372-9129-D6014B9D5B97}"/>
               </a:ext>
             </a:extLst>
           </p:cNvPr>
@@ -6701,10 +6053,10 @@
       </p:sp>
       <p:sp>
         <p:nvSpPr>
-          <p:cNvPr id="10" name="目指す体験：勝つための判断そのものが、キャラクターの見せ場になる。">
+          <p:cNvPr id="8" name="目指す体験：勝つための判断そのものが、キャラクターの見せ場になる。">
             <a:extLst xmlns:a="http://schemas.openxmlformats.org/drawingml/2006/main">
               <a:ext uri="{FF2B5EF4-FFF2-40B4-BE49-F238E27FC236}">
-                <a16:creationId xmlns:a16="http://schemas.microsoft.com/office/drawing/2014/main" id="{DFB24809-C3A5-42D6-AA68-9358518ADB56}"/>
+                <a16:creationId xmlns:a16="http://schemas.microsoft.com/office/drawing/2014/main" id="{F50FDD45-080F-4E3F-8EC2-7E6927A10D41}"/>
               </a:ext>
             </a:extLst>
           </p:cNvPr>
@@ -6864,7 +6216,7 @@
     </p:spTree>
     <p:extLst>
       <p:ext uri="{BB962C8B-B14F-4D97-AF65-F5344CB8AC3E}">
-        <p14:creationId xmlns:p14="http://schemas.microsoft.com/office/powerpoint/2010/main" val="2015981636"/>
+        <p14:creationId xmlns:p14="http://schemas.microsoft.com/office/powerpoint/2010/main" val="1806223280"/>
       </p:ext>
     </p:extLst>
   </p:cSld>
@@ -6892,10 +6244,10 @@
       </p:grpSpPr>
       <p:sp>
         <p:nvSpPr>
-          <p:cNvPr id="11" name="アピールが生むリスクと見返り">
+          <p:cNvPr id="9" name="アピールが生むリスクと見返り">
             <a:extLst xmlns:a="http://schemas.openxmlformats.org/drawingml/2006/main">
               <a:ext uri="{FF2B5EF4-FFF2-40B4-BE49-F238E27FC236}">
-                <a16:creationId xmlns:a16="http://schemas.microsoft.com/office/drawing/2014/main" id="{5D4EF3CA-E40A-4552-8EFF-1BA236DE2115}"/>
+                <a16:creationId xmlns:a16="http://schemas.microsoft.com/office/drawing/2014/main" id="{1F7EA334-D1F5-4E99-BF00-6BBC7E9A4AE1}"/>
               </a:ext>
             </a:extLst>
           </p:cNvPr>
@@ -7057,7 +6409,7 @@
           <p:cNvPr id="2" name="企画上のルール：攻撃を止める瞬間にも、判断を持たせる">
             <a:extLst xmlns:a="http://schemas.openxmlformats.org/drawingml/2006/main">
               <a:ext uri="{FF2B5EF4-FFF2-40B4-BE49-F238E27FC236}">
-                <a16:creationId xmlns:a16="http://schemas.microsoft.com/office/drawing/2014/main" id="{1A51D30D-353C-4344-B14F-E497CDBD53EE}"/>
+                <a16:creationId xmlns:a16="http://schemas.microsoft.com/office/drawing/2014/main" id="{EA19DB25-2CD7-4BF9-A088-07E6530CC451}"/>
               </a:ext>
             </a:extLst>
           </p:cNvPr>
@@ -7214,336 +6566,12 @@
           </a:p>
         </p:txBody>
       </p:sp>
-      <p:sp>
-        <p:nvSpPr>
-          <p:cNvPr id="3" name="V-Link Battle / 企画書">
+      <p:pic>
+        <p:nvPicPr>
+          <p:cNvPr id="3" name="">
             <a:extLst xmlns:a="http://schemas.openxmlformats.org/drawingml/2006/main">
               <a:ext uri="{FF2B5EF4-FFF2-40B4-BE49-F238E27FC236}">
-                <a16:creationId xmlns:a16="http://schemas.microsoft.com/office/drawing/2014/main" id="{27009DAA-7897-4D3C-B3B9-8555FAB35801}"/>
-              </a:ext>
-            </a:extLst>
-          </p:cNvPr>
-          <p:cNvSpPr>
-            <a:spLocks xmlns:a="http://schemas.openxmlformats.org/drawingml/2006/main" noGrp="1"/>
-          </p:cNvSpPr>
-          <p:nvPr/>
-        </p:nvSpPr>
-        <p:spPr>
-          <a:xfrm xmlns:a="http://schemas.openxmlformats.org/drawingml/2006/main">
-            <a:off x="609600" y="6448425"/>
-            <a:ext cx="9525000" cy="247650"/>
-          </a:xfrm>
-          <a:prstGeom xmlns:a="http://schemas.openxmlformats.org/drawingml/2006/main" prst="rect">
-            <a:avLst/>
-          </a:prstGeom>
-          <a:noFill xmlns:a="http://schemas.openxmlformats.org/drawingml/2006/main"/>
-          <a:ln xmlns:a="http://schemas.openxmlformats.org/drawingml/2006/main" w="0">
-            <a:noFill/>
-          </a:ln>
-        </p:spPr>
-        <p:txBody>
-          <a:bodyPr xmlns:a="http://schemas.openxmlformats.org/drawingml/2006/main" wrap="square" lIns="0" tIns="0" rIns="0" bIns="0" anchor="t">
-            <a:noAutofit/>
-          </a:bodyPr>
-          <a:lstStyle xmlns:a="http://schemas.openxmlformats.org/drawingml/2006/main">
-            <a:defPPr>
-              <a:defRPr sz="1200" b="0">
-                <a:solidFill>
-                  <a:srgbClr val="C5BDCE"/>
-                </a:solidFill>
-                <a:latin typeface="Meiryo"/>
-                <a:ea typeface="Meiryo"/>
-                <a:cs typeface="Meiryo"/>
-              </a:defRPr>
-            </a:defPPr>
-            <a:lvl1pPr>
-              <a:defRPr sz="1200" b="0">
-                <a:solidFill>
-                  <a:srgbClr val="C5BDCE"/>
-                </a:solidFill>
-                <a:latin typeface="Meiryo"/>
-                <a:ea typeface="Meiryo"/>
-                <a:cs typeface="Meiryo"/>
-              </a:defRPr>
-            </a:lvl1pPr>
-            <a:lvl2pPr>
-              <a:defRPr sz="1200" b="0">
-                <a:solidFill>
-                  <a:srgbClr val="C5BDCE"/>
-                </a:solidFill>
-                <a:latin typeface="Meiryo"/>
-                <a:ea typeface="Meiryo"/>
-                <a:cs typeface="Meiryo"/>
-              </a:defRPr>
-            </a:lvl2pPr>
-            <a:lvl3pPr>
-              <a:defRPr sz="1200" b="0">
-                <a:solidFill>
-                  <a:srgbClr val="C5BDCE"/>
-                </a:solidFill>
-                <a:latin typeface="Meiryo"/>
-                <a:ea typeface="Meiryo"/>
-                <a:cs typeface="Meiryo"/>
-              </a:defRPr>
-            </a:lvl3pPr>
-            <a:lvl4pPr>
-              <a:defRPr sz="1200" b="0">
-                <a:solidFill>
-                  <a:srgbClr val="C5BDCE"/>
-                </a:solidFill>
-                <a:latin typeface="Meiryo"/>
-                <a:ea typeface="Meiryo"/>
-                <a:cs typeface="Meiryo"/>
-              </a:defRPr>
-            </a:lvl4pPr>
-            <a:lvl5pPr>
-              <a:defRPr sz="1200" b="0">
-                <a:solidFill>
-                  <a:srgbClr val="C5BDCE"/>
-                </a:solidFill>
-                <a:latin typeface="Meiryo"/>
-                <a:ea typeface="Meiryo"/>
-                <a:cs typeface="Meiryo"/>
-              </a:defRPr>
-            </a:lvl5pPr>
-            <a:lvl6pPr>
-              <a:defRPr sz="1200" b="0">
-                <a:solidFill>
-                  <a:srgbClr val="C5BDCE"/>
-                </a:solidFill>
-                <a:latin typeface="Meiryo"/>
-                <a:ea typeface="Meiryo"/>
-                <a:cs typeface="Meiryo"/>
-              </a:defRPr>
-            </a:lvl6pPr>
-            <a:lvl7pPr>
-              <a:defRPr sz="1200" b="0">
-                <a:solidFill>
-                  <a:srgbClr val="C5BDCE"/>
-                </a:solidFill>
-                <a:latin typeface="Meiryo"/>
-                <a:ea typeface="Meiryo"/>
-                <a:cs typeface="Meiryo"/>
-              </a:defRPr>
-            </a:lvl7pPr>
-            <a:lvl8pPr>
-              <a:defRPr sz="1200" b="0">
-                <a:solidFill>
-                  <a:srgbClr val="C5BDCE"/>
-                </a:solidFill>
-                <a:latin typeface="Meiryo"/>
-                <a:ea typeface="Meiryo"/>
-                <a:cs typeface="Meiryo"/>
-              </a:defRPr>
-            </a:lvl8pPr>
-            <a:lvl9pPr>
-              <a:defRPr sz="1200" b="0">
-                <a:solidFill>
-                  <a:srgbClr val="C5BDCE"/>
-                </a:solidFill>
-                <a:latin typeface="Meiryo"/>
-                <a:ea typeface="Meiryo"/>
-                <a:cs typeface="Meiryo"/>
-              </a:defRPr>
-            </a:lvl9pPr>
-          </a:lstStyle>
-          <a:p xmlns:a="http://schemas.openxmlformats.org/drawingml/2006/main">
-            <a:pPr>
-              <a:lnSpc>
-                <a:spcPct val="118000"/>
-              </a:lnSpc>
-              <a:buNone/>
-              <a:defRPr sz="1200" b="0">
-                <a:solidFill>
-                  <a:srgbClr val="C5BDCE"/>
-                </a:solidFill>
-                <a:latin typeface="Meiryo"/>
-                <a:ea typeface="Meiryo"/>
-                <a:cs typeface="Meiryo"/>
-              </a:defRPr>
-            </a:pPr>
-            <a:r>
-              <a:rPr sz="1200" b="0">
-                <a:solidFill>
-                  <a:srgbClr val="C5BDCE"/>
-                </a:solidFill>
-                <a:latin typeface="Meiryo"/>
-                <a:ea typeface="Meiryo"/>
-                <a:cs typeface="Meiryo"/>
-              </a:rPr>
-              <a:t>V-Link Battle / 企画書</a:t>
-            </a:r>
-          </a:p>
-        </p:txBody>
-      </p:sp>
-      <p:sp>
-        <p:nvSpPr>
-          <p:cNvPr id="4" name="03 / 06">
-            <a:extLst xmlns:a="http://schemas.openxmlformats.org/drawingml/2006/main">
-              <a:ext uri="{FF2B5EF4-FFF2-40B4-BE49-F238E27FC236}">
-                <a16:creationId xmlns:a16="http://schemas.microsoft.com/office/drawing/2014/main" id="{F15253C4-E0A9-4F3E-A481-9DEC4B1A54E5}"/>
-              </a:ext>
-            </a:extLst>
-          </p:cNvPr>
-          <p:cNvSpPr>
-            <a:spLocks xmlns:a="http://schemas.openxmlformats.org/drawingml/2006/main" noGrp="1"/>
-          </p:cNvSpPr>
-          <p:nvPr/>
-        </p:nvSpPr>
-        <p:spPr>
-          <a:xfrm xmlns:a="http://schemas.openxmlformats.org/drawingml/2006/main">
-            <a:off x="10668000" y="6448425"/>
-            <a:ext cx="952500" cy="247650"/>
-          </a:xfrm>
-          <a:prstGeom xmlns:a="http://schemas.openxmlformats.org/drawingml/2006/main" prst="rect">
-            <a:avLst/>
-          </a:prstGeom>
-          <a:noFill xmlns:a="http://schemas.openxmlformats.org/drawingml/2006/main"/>
-          <a:ln xmlns:a="http://schemas.openxmlformats.org/drawingml/2006/main" w="0">
-            <a:noFill/>
-          </a:ln>
-        </p:spPr>
-        <p:txBody>
-          <a:bodyPr xmlns:a="http://schemas.openxmlformats.org/drawingml/2006/main" wrap="square" lIns="0" tIns="0" rIns="0" bIns="0" anchor="t">
-            <a:noAutofit/>
-          </a:bodyPr>
-          <a:lstStyle xmlns:a="http://schemas.openxmlformats.org/drawingml/2006/main">
-            <a:defPPr>
-              <a:defRPr sz="1200" b="0">
-                <a:solidFill>
-                  <a:srgbClr val="C5BDCE"/>
-                </a:solidFill>
-                <a:latin typeface="Meiryo"/>
-                <a:ea typeface="Meiryo"/>
-                <a:cs typeface="Meiryo"/>
-              </a:defRPr>
-            </a:defPPr>
-            <a:lvl1pPr>
-              <a:defRPr sz="1200" b="0">
-                <a:solidFill>
-                  <a:srgbClr val="C5BDCE"/>
-                </a:solidFill>
-                <a:latin typeface="Meiryo"/>
-                <a:ea typeface="Meiryo"/>
-                <a:cs typeface="Meiryo"/>
-              </a:defRPr>
-            </a:lvl1pPr>
-            <a:lvl2pPr>
-              <a:defRPr sz="1200" b="0">
-                <a:solidFill>
-                  <a:srgbClr val="C5BDCE"/>
-                </a:solidFill>
-                <a:latin typeface="Meiryo"/>
-                <a:ea typeface="Meiryo"/>
-                <a:cs typeface="Meiryo"/>
-              </a:defRPr>
-            </a:lvl2pPr>
-            <a:lvl3pPr>
-              <a:defRPr sz="1200" b="0">
-                <a:solidFill>
-                  <a:srgbClr val="C5BDCE"/>
-                </a:solidFill>
-                <a:latin typeface="Meiryo"/>
-                <a:ea typeface="Meiryo"/>
-                <a:cs typeface="Meiryo"/>
-              </a:defRPr>
-            </a:lvl3pPr>
-            <a:lvl4pPr>
-              <a:defRPr sz="1200" b="0">
-                <a:solidFill>
-                  <a:srgbClr val="C5BDCE"/>
-                </a:solidFill>
-                <a:latin typeface="Meiryo"/>
-                <a:ea typeface="Meiryo"/>
-                <a:cs typeface="Meiryo"/>
-              </a:defRPr>
-            </a:lvl4pPr>
-            <a:lvl5pPr>
-              <a:defRPr sz="1200" b="0">
-                <a:solidFill>
-                  <a:srgbClr val="C5BDCE"/>
-                </a:solidFill>
-                <a:latin typeface="Meiryo"/>
-                <a:ea typeface="Meiryo"/>
-                <a:cs typeface="Meiryo"/>
-              </a:defRPr>
-            </a:lvl5pPr>
-            <a:lvl6pPr>
-              <a:defRPr sz="1200" b="0">
-                <a:solidFill>
-                  <a:srgbClr val="C5BDCE"/>
-                </a:solidFill>
-                <a:latin typeface="Meiryo"/>
-                <a:ea typeface="Meiryo"/>
-                <a:cs typeface="Meiryo"/>
-              </a:defRPr>
-            </a:lvl6pPr>
-            <a:lvl7pPr>
-              <a:defRPr sz="1200" b="0">
-                <a:solidFill>
-                  <a:srgbClr val="C5BDCE"/>
-                </a:solidFill>
-                <a:latin typeface="Meiryo"/>
-                <a:ea typeface="Meiryo"/>
-                <a:cs typeface="Meiryo"/>
-              </a:defRPr>
-            </a:lvl7pPr>
-            <a:lvl8pPr>
-              <a:defRPr sz="1200" b="0">
-                <a:solidFill>
-                  <a:srgbClr val="C5BDCE"/>
-                </a:solidFill>
-                <a:latin typeface="Meiryo"/>
-                <a:ea typeface="Meiryo"/>
-                <a:cs typeface="Meiryo"/>
-              </a:defRPr>
-            </a:lvl8pPr>
-            <a:lvl9pPr>
-              <a:defRPr sz="1200" b="0">
-                <a:solidFill>
-                  <a:srgbClr val="C5BDCE"/>
-                </a:solidFill>
-                <a:latin typeface="Meiryo"/>
-                <a:ea typeface="Meiryo"/>
-                <a:cs typeface="Meiryo"/>
-              </a:defRPr>
-            </a:lvl9pPr>
-          </a:lstStyle>
-          <a:p xmlns:a="http://schemas.openxmlformats.org/drawingml/2006/main">
-            <a:pPr>
-              <a:lnSpc>
-                <a:spcPct val="118000"/>
-              </a:lnSpc>
-              <a:buNone/>
-              <a:defRPr sz="1200" b="0">
-                <a:solidFill>
-                  <a:srgbClr val="C5BDCE"/>
-                </a:solidFill>
-                <a:latin typeface="Meiryo"/>
-                <a:ea typeface="Meiryo"/>
-                <a:cs typeface="Meiryo"/>
-              </a:defRPr>
-            </a:pPr>
-            <a:r>
-              <a:rPr sz="1200" b="0">
-                <a:solidFill>
-                  <a:srgbClr val="C5BDCE"/>
-                </a:solidFill>
-                <a:latin typeface="Meiryo"/>
-                <a:ea typeface="Meiryo"/>
-                <a:cs typeface="Meiryo"/>
-              </a:rPr>
-              <a:t>03 / 06</a:t>
-            </a:r>
-          </a:p>
-        </p:txBody>
-      </p:sp>
-      <p:pic>
-        <p:nvPicPr>
-          <p:cNvPr id="5" name="">
-            <a:extLst xmlns:a="http://schemas.openxmlformats.org/drawingml/2006/main">
-              <a:ext uri="{FF2B5EF4-FFF2-40B4-BE49-F238E27FC236}">
-                <a16:creationId xmlns:a16="http://schemas.microsoft.com/office/drawing/2014/main" id="{B359C183-C31B-47ED-A432-3165797A385D}"/>
+                <a16:creationId xmlns:a16="http://schemas.microsoft.com/office/drawing/2014/main" id="{75AE7496-6E9E-4DAC-9CC7-EA5E0FA49FD2}"/>
               </a:ext>
             </a:extLst>
           </p:cNvPr>
@@ -7553,7 +6581,7 @@
           <p:nvPr/>
         </p:nvPicPr>
         <p:blipFill>
-          <a:blip xmlns:r="http://schemas.openxmlformats.org/officeDocument/2006/relationships" xmlns:a="http://schemas.openxmlformats.org/drawingml/2006/main" r:embed="Rcb96e7a98879491a"/>
+          <a:blip xmlns:r="http://schemas.openxmlformats.org/officeDocument/2006/relationships" xmlns:a="http://schemas.openxmlformats.org/drawingml/2006/main" r:embed="Rd019716c933c4301"/>
           <a:stretch xmlns:a="http://schemas.openxmlformats.org/drawingml/2006/main"/>
         </p:blipFill>
         <p:spPr>
@@ -7568,10 +6596,10 @@
       </p:pic>
       <p:sp>
         <p:nvSpPr>
-          <p:cNvPr id="6" name="隙を見つけて魅せる">
+          <p:cNvPr id="4" name="隙を見つけて魅せる">
             <a:extLst xmlns:a="http://schemas.openxmlformats.org/drawingml/2006/main">
               <a:ext uri="{FF2B5EF4-FFF2-40B4-BE49-F238E27FC236}">
-                <a16:creationId xmlns:a16="http://schemas.microsoft.com/office/drawing/2014/main" id="{CB592F0D-D9E1-4E5B-9ED1-AF67A3FD0CE1}"/>
+                <a16:creationId xmlns:a16="http://schemas.microsoft.com/office/drawing/2014/main" id="{A7BF2596-F551-4497-B1F7-7B243F64B376}"/>
               </a:ext>
             </a:extLst>
           </p:cNvPr>
@@ -7730,10 +6758,10 @@
       </p:sp>
       <p:sp>
         <p:nvSpPr>
-          <p:cNvPr id="7" name="アピール中は無防備。&#10;成功後の攻撃で&#10;ボルテージを高める。">
+          <p:cNvPr id="5" name="アピール中は無防備。&#10;成功後の攻撃で&#10;ボルテージを高める。">
             <a:extLst xmlns:a="http://schemas.openxmlformats.org/drawingml/2006/main">
               <a:ext uri="{FF2B5EF4-FFF2-40B4-BE49-F238E27FC236}">
-                <a16:creationId xmlns:a16="http://schemas.microsoft.com/office/drawing/2014/main" id="{4AC8A181-B6CF-4AF9-9902-DDBF9B3F562D}"/>
+                <a16:creationId xmlns:a16="http://schemas.microsoft.com/office/drawing/2014/main" id="{B61A5ACB-8E03-476C-8E64-E185FBC6E1F3}"/>
               </a:ext>
             </a:extLst>
           </p:cNvPr>
@@ -7946,10 +6974,10 @@
       </p:sp>
       <p:sp>
         <p:nvSpPr>
-          <p:cNvPr id="8" name="読み合いの場面">
+          <p:cNvPr id="6" name="読み合いの場面">
             <a:extLst xmlns:a="http://schemas.openxmlformats.org/drawingml/2006/main">
               <a:ext uri="{FF2B5EF4-FFF2-40B4-BE49-F238E27FC236}">
-                <a16:creationId xmlns:a16="http://schemas.microsoft.com/office/drawing/2014/main" id="{E81B06E5-90D9-4B5F-95FD-2EA9C1FFDC45}"/>
+                <a16:creationId xmlns:a16="http://schemas.microsoft.com/office/drawing/2014/main" id="{77BC65BC-97AC-4479-9682-77F433121D3E}"/>
               </a:ext>
             </a:extLst>
           </p:cNvPr>
@@ -8108,10 +7136,10 @@
       </p:sp>
       <p:sp>
         <p:nvSpPr>
-          <p:cNvPr id="9" name="安全に攻撃を続けるか。&#10;相手の動きを読んで、&#10;アピールを挟むか。">
+          <p:cNvPr id="7" name="安全に攻撃を続けるか。&#10;相手の動きを読んで、&#10;アピールを挟むか。">
             <a:extLst xmlns:a="http://schemas.openxmlformats.org/drawingml/2006/main">
               <a:ext uri="{FF2B5EF4-FFF2-40B4-BE49-F238E27FC236}">
-                <a16:creationId xmlns:a16="http://schemas.microsoft.com/office/drawing/2014/main" id="{61C9ECA6-435E-43BC-8D40-CE0CFD3BE8F1}"/>
+                <a16:creationId xmlns:a16="http://schemas.microsoft.com/office/drawing/2014/main" id="{E5B02D1E-76D3-4A6F-B3D8-DF96EF1C305E}"/>
               </a:ext>
             </a:extLst>
           </p:cNvPr>
@@ -8324,10 +7352,10 @@
       </p:sp>
       <p:sp>
         <p:nvSpPr>
-          <p:cNvPr id="10" name="ボルテージを高め、必殺技の見せ場へつなぐ構想。">
+          <p:cNvPr id="8" name="ボルテージを高め、必殺技の見せ場へつなぐ構想。">
             <a:extLst xmlns:a="http://schemas.openxmlformats.org/drawingml/2006/main">
               <a:ext uri="{FF2B5EF4-FFF2-40B4-BE49-F238E27FC236}">
-                <a16:creationId xmlns:a16="http://schemas.microsoft.com/office/drawing/2014/main" id="{0B5776BB-2331-4723-BE7D-4A474779E8D5}"/>
+                <a16:creationId xmlns:a16="http://schemas.microsoft.com/office/drawing/2014/main" id="{B4F8D1FA-2909-45FE-8A2E-23A5EDFC0A23}"/>
               </a:ext>
             </a:extLst>
           </p:cNvPr>
@@ -8487,7 +7515,7 @@
     </p:spTree>
     <p:extLst>
       <p:ext uri="{BB962C8B-B14F-4D97-AF65-F5344CB8AC3E}">
-        <p14:creationId xmlns:p14="http://schemas.microsoft.com/office/powerpoint/2010/main" val="2095331551"/>
+        <p14:creationId xmlns:p14="http://schemas.microsoft.com/office/powerpoint/2010/main" val="1172719996"/>
       </p:ext>
     </p:extLst>
   </p:cSld>
@@ -8515,10 +7543,10 @@
       </p:grpSpPr>
       <p:sp>
         <p:nvSpPr>
-          <p:cNvPr id="11" name="配信らしさを、戦場の出来事に">
+          <p:cNvPr id="9" name="配信を感じさせる画面と演出">
             <a:extLst xmlns:a="http://schemas.openxmlformats.org/drawingml/2006/main">
               <a:ext uri="{FF2B5EF4-FFF2-40B4-BE49-F238E27FC236}">
-                <a16:creationId xmlns:a16="http://schemas.microsoft.com/office/drawing/2014/main" id="{3136587D-2104-4F8B-9022-D7A15B2655AB}"/>
+                <a16:creationId xmlns:a16="http://schemas.microsoft.com/office/drawing/2014/main" id="{58E6E014-4065-4EDE-BB9F-E91AAB82E984}"/>
               </a:ext>
             </a:extLst>
           </p:cNvPr>
@@ -8670,17 +7698,17 @@
                 <a:ea typeface="Meiryo"/>
                 <a:cs typeface="Meiryo"/>
               </a:rPr>
-              <a:t>配信らしさを、戦場の出来事に</a:t>
+              <a:t>配信を感じさせる画面と演出</a:t>
             </a:r>
           </a:p>
         </p:txBody>
       </p:sp>
       <p:sp>
         <p:nvSpPr>
-          <p:cNvPr id="2" name="企画上の仕掛け / 画像は制作時の実演映像">
+          <p:cNvPr id="2" name="コメントとウィンドウ風の画面で、デジタルな世界観を伝える">
             <a:extLst xmlns:a="http://schemas.openxmlformats.org/drawingml/2006/main">
               <a:ext uri="{FF2B5EF4-FFF2-40B4-BE49-F238E27FC236}">
-                <a16:creationId xmlns:a16="http://schemas.microsoft.com/office/drawing/2014/main" id="{36147A42-7E96-4C2D-8725-6ECCFE20282B}"/>
+                <a16:creationId xmlns:a16="http://schemas.microsoft.com/office/drawing/2014/main" id="{DC1B5A47-D8BA-47D2-88A4-DB6D14E5BDBC}"/>
               </a:ext>
             </a:extLst>
           </p:cNvPr>
@@ -8832,341 +7860,17 @@
                 <a:ea typeface="Meiryo"/>
                 <a:cs typeface="Meiryo"/>
               </a:rPr>
-              <a:t>企画上の仕掛け / 画像は制作時の実演映像</a:t>
-            </a:r>
-          </a:p>
-        </p:txBody>
-      </p:sp>
-      <p:sp>
-        <p:nvSpPr>
-          <p:cNvPr id="3" name="V-Link Battle / 企画書">
-            <a:extLst xmlns:a="http://schemas.openxmlformats.org/drawingml/2006/main">
-              <a:ext uri="{FF2B5EF4-FFF2-40B4-BE49-F238E27FC236}">
-                <a16:creationId xmlns:a16="http://schemas.microsoft.com/office/drawing/2014/main" id="{6197044B-5D53-4256-9AE2-18483A8686F0}"/>
-              </a:ext>
-            </a:extLst>
-          </p:cNvPr>
-          <p:cNvSpPr>
-            <a:spLocks xmlns:a="http://schemas.openxmlformats.org/drawingml/2006/main" noGrp="1"/>
-          </p:cNvSpPr>
-          <p:nvPr/>
-        </p:nvSpPr>
-        <p:spPr>
-          <a:xfrm xmlns:a="http://schemas.openxmlformats.org/drawingml/2006/main">
-            <a:off x="609600" y="6448425"/>
-            <a:ext cx="9525000" cy="247650"/>
-          </a:xfrm>
-          <a:prstGeom xmlns:a="http://schemas.openxmlformats.org/drawingml/2006/main" prst="rect">
-            <a:avLst/>
-          </a:prstGeom>
-          <a:noFill xmlns:a="http://schemas.openxmlformats.org/drawingml/2006/main"/>
-          <a:ln xmlns:a="http://schemas.openxmlformats.org/drawingml/2006/main" w="0">
-            <a:noFill/>
-          </a:ln>
-        </p:spPr>
-        <p:txBody>
-          <a:bodyPr xmlns:a="http://schemas.openxmlformats.org/drawingml/2006/main" wrap="square" lIns="0" tIns="0" rIns="0" bIns="0" anchor="t">
-            <a:noAutofit/>
-          </a:bodyPr>
-          <a:lstStyle xmlns:a="http://schemas.openxmlformats.org/drawingml/2006/main">
-            <a:defPPr>
-              <a:defRPr sz="1200" b="0">
-                <a:solidFill>
-                  <a:srgbClr val="C5BDCE"/>
-                </a:solidFill>
-                <a:latin typeface="Meiryo"/>
-                <a:ea typeface="Meiryo"/>
-                <a:cs typeface="Meiryo"/>
-              </a:defRPr>
-            </a:defPPr>
-            <a:lvl1pPr>
-              <a:defRPr sz="1200" b="0">
-                <a:solidFill>
-                  <a:srgbClr val="C5BDCE"/>
-                </a:solidFill>
-                <a:latin typeface="Meiryo"/>
-                <a:ea typeface="Meiryo"/>
-                <a:cs typeface="Meiryo"/>
-              </a:defRPr>
-            </a:lvl1pPr>
-            <a:lvl2pPr>
-              <a:defRPr sz="1200" b="0">
-                <a:solidFill>
-                  <a:srgbClr val="C5BDCE"/>
-                </a:solidFill>
-                <a:latin typeface="Meiryo"/>
-                <a:ea typeface="Meiryo"/>
-                <a:cs typeface="Meiryo"/>
-              </a:defRPr>
-            </a:lvl2pPr>
-            <a:lvl3pPr>
-              <a:defRPr sz="1200" b="0">
-                <a:solidFill>
-                  <a:srgbClr val="C5BDCE"/>
-                </a:solidFill>
-                <a:latin typeface="Meiryo"/>
-                <a:ea typeface="Meiryo"/>
-                <a:cs typeface="Meiryo"/>
-              </a:defRPr>
-            </a:lvl3pPr>
-            <a:lvl4pPr>
-              <a:defRPr sz="1200" b="0">
-                <a:solidFill>
-                  <a:srgbClr val="C5BDCE"/>
-                </a:solidFill>
-                <a:latin typeface="Meiryo"/>
-                <a:ea typeface="Meiryo"/>
-                <a:cs typeface="Meiryo"/>
-              </a:defRPr>
-            </a:lvl4pPr>
-            <a:lvl5pPr>
-              <a:defRPr sz="1200" b="0">
-                <a:solidFill>
-                  <a:srgbClr val="C5BDCE"/>
-                </a:solidFill>
-                <a:latin typeface="Meiryo"/>
-                <a:ea typeface="Meiryo"/>
-                <a:cs typeface="Meiryo"/>
-              </a:defRPr>
-            </a:lvl5pPr>
-            <a:lvl6pPr>
-              <a:defRPr sz="1200" b="0">
-                <a:solidFill>
-                  <a:srgbClr val="C5BDCE"/>
-                </a:solidFill>
-                <a:latin typeface="Meiryo"/>
-                <a:ea typeface="Meiryo"/>
-                <a:cs typeface="Meiryo"/>
-              </a:defRPr>
-            </a:lvl6pPr>
-            <a:lvl7pPr>
-              <a:defRPr sz="1200" b="0">
-                <a:solidFill>
-                  <a:srgbClr val="C5BDCE"/>
-                </a:solidFill>
-                <a:latin typeface="Meiryo"/>
-                <a:ea typeface="Meiryo"/>
-                <a:cs typeface="Meiryo"/>
-              </a:defRPr>
-            </a:lvl7pPr>
-            <a:lvl8pPr>
-              <a:defRPr sz="1200" b="0">
-                <a:solidFill>
-                  <a:srgbClr val="C5BDCE"/>
-                </a:solidFill>
-                <a:latin typeface="Meiryo"/>
-                <a:ea typeface="Meiryo"/>
-                <a:cs typeface="Meiryo"/>
-              </a:defRPr>
-            </a:lvl8pPr>
-            <a:lvl9pPr>
-              <a:defRPr sz="1200" b="0">
-                <a:solidFill>
-                  <a:srgbClr val="C5BDCE"/>
-                </a:solidFill>
-                <a:latin typeface="Meiryo"/>
-                <a:ea typeface="Meiryo"/>
-                <a:cs typeface="Meiryo"/>
-              </a:defRPr>
-            </a:lvl9pPr>
-          </a:lstStyle>
-          <a:p xmlns:a="http://schemas.openxmlformats.org/drawingml/2006/main">
-            <a:pPr>
-              <a:lnSpc>
-                <a:spcPct val="118000"/>
-              </a:lnSpc>
-              <a:buNone/>
-              <a:defRPr sz="1200" b="0">
-                <a:solidFill>
-                  <a:srgbClr val="C5BDCE"/>
-                </a:solidFill>
-                <a:latin typeface="Meiryo"/>
-                <a:ea typeface="Meiryo"/>
-                <a:cs typeface="Meiryo"/>
-              </a:defRPr>
-            </a:pPr>
-            <a:r>
-              <a:rPr sz="1200" b="0">
-                <a:solidFill>
-                  <a:srgbClr val="C5BDCE"/>
-                </a:solidFill>
-                <a:latin typeface="Meiryo"/>
-                <a:ea typeface="Meiryo"/>
-                <a:cs typeface="Meiryo"/>
-              </a:rPr>
-              <a:t>V-Link Battle / 企画書</a:t>
-            </a:r>
-          </a:p>
-        </p:txBody>
-      </p:sp>
-      <p:sp>
-        <p:nvSpPr>
-          <p:cNvPr id="4" name="04 / 06">
-            <a:extLst xmlns:a="http://schemas.openxmlformats.org/drawingml/2006/main">
-              <a:ext uri="{FF2B5EF4-FFF2-40B4-BE49-F238E27FC236}">
-                <a16:creationId xmlns:a16="http://schemas.microsoft.com/office/drawing/2014/main" id="{453120AC-CB38-4DF4-B6E1-678E9A6A2EC3}"/>
-              </a:ext>
-            </a:extLst>
-          </p:cNvPr>
-          <p:cNvSpPr>
-            <a:spLocks xmlns:a="http://schemas.openxmlformats.org/drawingml/2006/main" noGrp="1"/>
-          </p:cNvSpPr>
-          <p:nvPr/>
-        </p:nvSpPr>
-        <p:spPr>
-          <a:xfrm xmlns:a="http://schemas.openxmlformats.org/drawingml/2006/main">
-            <a:off x="10668000" y="6448425"/>
-            <a:ext cx="952500" cy="247650"/>
-          </a:xfrm>
-          <a:prstGeom xmlns:a="http://schemas.openxmlformats.org/drawingml/2006/main" prst="rect">
-            <a:avLst/>
-          </a:prstGeom>
-          <a:noFill xmlns:a="http://schemas.openxmlformats.org/drawingml/2006/main"/>
-          <a:ln xmlns:a="http://schemas.openxmlformats.org/drawingml/2006/main" w="0">
-            <a:noFill/>
-          </a:ln>
-        </p:spPr>
-        <p:txBody>
-          <a:bodyPr xmlns:a="http://schemas.openxmlformats.org/drawingml/2006/main" wrap="square" lIns="0" tIns="0" rIns="0" bIns="0" anchor="t">
-            <a:noAutofit/>
-          </a:bodyPr>
-          <a:lstStyle xmlns:a="http://schemas.openxmlformats.org/drawingml/2006/main">
-            <a:defPPr>
-              <a:defRPr sz="1200" b="0">
-                <a:solidFill>
-                  <a:srgbClr val="C5BDCE"/>
-                </a:solidFill>
-                <a:latin typeface="Meiryo"/>
-                <a:ea typeface="Meiryo"/>
-                <a:cs typeface="Meiryo"/>
-              </a:defRPr>
-            </a:defPPr>
-            <a:lvl1pPr>
-              <a:defRPr sz="1200" b="0">
-                <a:solidFill>
-                  <a:srgbClr val="C5BDCE"/>
-                </a:solidFill>
-                <a:latin typeface="Meiryo"/>
-                <a:ea typeface="Meiryo"/>
-                <a:cs typeface="Meiryo"/>
-              </a:defRPr>
-            </a:lvl1pPr>
-            <a:lvl2pPr>
-              <a:defRPr sz="1200" b="0">
-                <a:solidFill>
-                  <a:srgbClr val="C5BDCE"/>
-                </a:solidFill>
-                <a:latin typeface="Meiryo"/>
-                <a:ea typeface="Meiryo"/>
-                <a:cs typeface="Meiryo"/>
-              </a:defRPr>
-            </a:lvl2pPr>
-            <a:lvl3pPr>
-              <a:defRPr sz="1200" b="0">
-                <a:solidFill>
-                  <a:srgbClr val="C5BDCE"/>
-                </a:solidFill>
-                <a:latin typeface="Meiryo"/>
-                <a:ea typeface="Meiryo"/>
-                <a:cs typeface="Meiryo"/>
-              </a:defRPr>
-            </a:lvl3pPr>
-            <a:lvl4pPr>
-              <a:defRPr sz="1200" b="0">
-                <a:solidFill>
-                  <a:srgbClr val="C5BDCE"/>
-                </a:solidFill>
-                <a:latin typeface="Meiryo"/>
-                <a:ea typeface="Meiryo"/>
-                <a:cs typeface="Meiryo"/>
-              </a:defRPr>
-            </a:lvl4pPr>
-            <a:lvl5pPr>
-              <a:defRPr sz="1200" b="0">
-                <a:solidFill>
-                  <a:srgbClr val="C5BDCE"/>
-                </a:solidFill>
-                <a:latin typeface="Meiryo"/>
-                <a:ea typeface="Meiryo"/>
-                <a:cs typeface="Meiryo"/>
-              </a:defRPr>
-            </a:lvl5pPr>
-            <a:lvl6pPr>
-              <a:defRPr sz="1200" b="0">
-                <a:solidFill>
-                  <a:srgbClr val="C5BDCE"/>
-                </a:solidFill>
-                <a:latin typeface="Meiryo"/>
-                <a:ea typeface="Meiryo"/>
-                <a:cs typeface="Meiryo"/>
-              </a:defRPr>
-            </a:lvl6pPr>
-            <a:lvl7pPr>
-              <a:defRPr sz="1200" b="0">
-                <a:solidFill>
-                  <a:srgbClr val="C5BDCE"/>
-                </a:solidFill>
-                <a:latin typeface="Meiryo"/>
-                <a:ea typeface="Meiryo"/>
-                <a:cs typeface="Meiryo"/>
-              </a:defRPr>
-            </a:lvl7pPr>
-            <a:lvl8pPr>
-              <a:defRPr sz="1200" b="0">
-                <a:solidFill>
-                  <a:srgbClr val="C5BDCE"/>
-                </a:solidFill>
-                <a:latin typeface="Meiryo"/>
-                <a:ea typeface="Meiryo"/>
-                <a:cs typeface="Meiryo"/>
-              </a:defRPr>
-            </a:lvl8pPr>
-            <a:lvl9pPr>
-              <a:defRPr sz="1200" b="0">
-                <a:solidFill>
-                  <a:srgbClr val="C5BDCE"/>
-                </a:solidFill>
-                <a:latin typeface="Meiryo"/>
-                <a:ea typeface="Meiryo"/>
-                <a:cs typeface="Meiryo"/>
-              </a:defRPr>
-            </a:lvl9pPr>
-          </a:lstStyle>
-          <a:p xmlns:a="http://schemas.openxmlformats.org/drawingml/2006/main">
-            <a:pPr>
-              <a:lnSpc>
-                <a:spcPct val="118000"/>
-              </a:lnSpc>
-              <a:buNone/>
-              <a:defRPr sz="1200" b="0">
-                <a:solidFill>
-                  <a:srgbClr val="C5BDCE"/>
-                </a:solidFill>
-                <a:latin typeface="Meiryo"/>
-                <a:ea typeface="Meiryo"/>
-                <a:cs typeface="Meiryo"/>
-              </a:defRPr>
-            </a:pPr>
-            <a:r>
-              <a:rPr sz="1200" b="0">
-                <a:solidFill>
-                  <a:srgbClr val="C5BDCE"/>
-                </a:solidFill>
-                <a:latin typeface="Meiryo"/>
-                <a:ea typeface="Meiryo"/>
-                <a:cs typeface="Meiryo"/>
-              </a:rPr>
-              <a:t>04 / 06</a:t>
+              <a:t>コメントとウィンドウ風の画面で、デジタルな世界観を伝える</a:t>
             </a:r>
           </a:p>
         </p:txBody>
       </p:sp>
       <p:pic>
         <p:nvPicPr>
-          <p:cNvPr id="5" name="">
+          <p:cNvPr id="3" name="">
             <a:extLst xmlns:a="http://schemas.openxmlformats.org/drawingml/2006/main">
               <a:ext uri="{FF2B5EF4-FFF2-40B4-BE49-F238E27FC236}">
-                <a16:creationId xmlns:a16="http://schemas.microsoft.com/office/drawing/2014/main" id="{47E9CAB6-AB63-45DC-A2A0-10B02E09A89B}"/>
+                <a16:creationId xmlns:a16="http://schemas.microsoft.com/office/drawing/2014/main" id="{133AD4BD-5FB0-4CEF-A1FB-063874068519}"/>
               </a:ext>
             </a:extLst>
           </p:cNvPr>
@@ -9176,7 +7880,7 @@
           <p:nvPr/>
         </p:nvPicPr>
         <p:blipFill>
-          <a:blip xmlns:r="http://schemas.openxmlformats.org/officeDocument/2006/relationships" xmlns:a="http://schemas.openxmlformats.org/drawingml/2006/main" r:embed="Rcb35fd0556354d3b"/>
+          <a:blip xmlns:r="http://schemas.openxmlformats.org/officeDocument/2006/relationships" xmlns:a="http://schemas.openxmlformats.org/drawingml/2006/main" r:embed="R48b0bb43adbf4512"/>
           <a:stretch xmlns:a="http://schemas.openxmlformats.org/drawingml/2006/main"/>
         </p:blipFill>
         <p:spPr>
@@ -9191,10 +7895,10 @@
       </p:pic>
       <p:pic>
         <p:nvPicPr>
-          <p:cNvPr id="6" name="">
+          <p:cNvPr id="4" name="">
             <a:extLst xmlns:a="http://schemas.openxmlformats.org/drawingml/2006/main">
               <a:ext uri="{FF2B5EF4-FFF2-40B4-BE49-F238E27FC236}">
-                <a16:creationId xmlns:a16="http://schemas.microsoft.com/office/drawing/2014/main" id="{E41E2E74-C930-47DC-97C0-D533F63DA25E}"/>
+                <a16:creationId xmlns:a16="http://schemas.microsoft.com/office/drawing/2014/main" id="{555EF96A-5896-4C1A-9A88-877C1379EFA7}"/>
               </a:ext>
             </a:extLst>
           </p:cNvPr>
@@ -9204,7 +7908,7 @@
           <p:nvPr/>
         </p:nvPicPr>
         <p:blipFill>
-          <a:blip xmlns:r="http://schemas.openxmlformats.org/officeDocument/2006/relationships" xmlns:a="http://schemas.openxmlformats.org/drawingml/2006/main" r:embed="Re5c52868c7fc4dda"/>
+          <a:blip xmlns:r="http://schemas.openxmlformats.org/officeDocument/2006/relationships" xmlns:a="http://schemas.openxmlformats.org/drawingml/2006/main" r:embed="Re3c0a4e1a4e64bb3"/>
           <a:stretch xmlns:a="http://schemas.openxmlformats.org/drawingml/2006/main"/>
         </p:blipFill>
         <p:spPr>
@@ -9219,10 +7923,10 @@
       </p:pic>
       <p:sp>
         <p:nvSpPr>
-          <p:cNvPr id="7" name="コメントに触れる判断">
+          <p:cNvPr id="5" name="立体的なコメント">
             <a:extLst xmlns:a="http://schemas.openxmlformats.org/drawingml/2006/main">
               <a:ext uri="{FF2B5EF4-FFF2-40B4-BE49-F238E27FC236}">
-                <a16:creationId xmlns:a16="http://schemas.microsoft.com/office/drawing/2014/main" id="{EC8FF389-FB16-4369-AF36-908516215AFC}"/>
+                <a16:creationId xmlns:a16="http://schemas.microsoft.com/office/drawing/2014/main" id="{8EF2B0CB-B687-4A74-933E-55ECEAFC576E}"/>
               </a:ext>
             </a:extLst>
           </p:cNvPr>
@@ -9374,17 +8078,17 @@
                 <a:ea typeface="Meiryo"/>
                 <a:cs typeface="Meiryo"/>
               </a:rPr>
-              <a:t>コメントに触れる判断</a:t>
+              <a:t>立体的なコメント</a:t>
             </a:r>
           </a:p>
         </p:txBody>
       </p:sp>
       <p:sp>
         <p:nvSpPr>
-          <p:cNvPr id="8" name="流れる言葉に効果を持たせ、&#10;拾う・避ける判断へつなげる。">
+          <p:cNvPr id="6" name="戦闘空間を横切る言葉で、&#10;配信の賑わいを表現する。">
             <a:extLst xmlns:a="http://schemas.openxmlformats.org/drawingml/2006/main">
               <a:ext uri="{FF2B5EF4-FFF2-40B4-BE49-F238E27FC236}">
-                <a16:creationId xmlns:a16="http://schemas.microsoft.com/office/drawing/2014/main" id="{50E6DE03-01D2-4A28-AE46-9DC238F234CA}"/>
+                <a16:creationId xmlns:a16="http://schemas.microsoft.com/office/drawing/2014/main" id="{266F3FF8-0EE8-4990-AD26-6E285574380A}"/>
               </a:ext>
             </a:extLst>
           </p:cNvPr>
@@ -9536,7 +8240,7 @@
                 <a:ea typeface="Meiryo"/>
                 <a:cs typeface="Meiryo"/>
               </a:rPr>
-              <a:t>流れる言葉に効果を持たせ、</a:t>
+              <a:t>戦闘空間を横切る言葉で、</a:t>
             </a:r>
           </a:p>
           <a:p xmlns:a="http://schemas.openxmlformats.org/drawingml/2006/main">
@@ -9563,17 +8267,17 @@
                 <a:ea typeface="Meiryo"/>
                 <a:cs typeface="Meiryo"/>
               </a:rPr>
-              <a:t>拾う・避ける判断へつなげる。</a:t>
+              <a:t>配信の賑わいを表現する。</a:t>
             </a:r>
           </a:p>
         </p:txBody>
       </p:sp>
       <p:sp>
         <p:nvSpPr>
-          <p:cNvPr id="9" name="通知による意外性">
+          <p:cNvPr id="7" name="ウィンドウ風の画面">
             <a:extLst xmlns:a="http://schemas.openxmlformats.org/drawingml/2006/main">
               <a:ext uri="{FF2B5EF4-FFF2-40B4-BE49-F238E27FC236}">
-                <a16:creationId xmlns:a16="http://schemas.microsoft.com/office/drawing/2014/main" id="{C32FCC8A-BED1-48F6-9EFD-D6163506941B}"/>
+                <a16:creationId xmlns:a16="http://schemas.microsoft.com/office/drawing/2014/main" id="{AE3F0443-352F-4372-BBE8-A434421ACA9A}"/>
               </a:ext>
             </a:extLst>
           </p:cNvPr>
@@ -9725,17 +8429,17 @@
                 <a:ea typeface="Meiryo"/>
                 <a:cs typeface="Meiryo"/>
               </a:rPr>
-              <a:t>通知による意外性</a:t>
+              <a:t>ウィンドウ風の画面</a:t>
             </a:r>
           </a:p>
         </p:txBody>
       </p:sp>
       <p:sp>
         <p:nvSpPr>
-          <p:cNvPr id="10" name="見慣れた通知ウィンドウの出現で、&#10;戦闘中のタイミングを変える。">
+          <p:cNvPr id="8" name="キャラクター選択もブラウザー風の枠に。&#10;対戦前から作品の世界観を伝える。">
             <a:extLst xmlns:a="http://schemas.openxmlformats.org/drawingml/2006/main">
               <a:ext uri="{FF2B5EF4-FFF2-40B4-BE49-F238E27FC236}">
-                <a16:creationId xmlns:a16="http://schemas.microsoft.com/office/drawing/2014/main" id="{28AF3A08-0E69-402C-AEA4-E5156FD87A90}"/>
+                <a16:creationId xmlns:a16="http://schemas.microsoft.com/office/drawing/2014/main" id="{1C4AE8F8-8C2F-4D10-9B10-ABE8E4A893C6}"/>
               </a:ext>
             </a:extLst>
           </p:cNvPr>
@@ -9887,7 +8591,7 @@
                 <a:ea typeface="Meiryo"/>
                 <a:cs typeface="Meiryo"/>
               </a:rPr>
-              <a:t>見慣れた通知ウィンドウの出現で、</a:t>
+              <a:t>キャラクター選択もブラウザー風の枠に。</a:t>
             </a:r>
           </a:p>
           <a:p xmlns:a="http://schemas.openxmlformats.org/drawingml/2006/main">
@@ -9914,7 +8618,7 @@
                 <a:ea typeface="Meiryo"/>
                 <a:cs typeface="Meiryo"/>
               </a:rPr>
-              <a:t>戦闘中のタイミングを変える。</a:t>
+              <a:t>対戦前から作品の世界観を伝える。</a:t>
             </a:r>
           </a:p>
         </p:txBody>
@@ -9922,7 +8626,7 @@
     </p:spTree>
     <p:extLst>
       <p:ext uri="{BB962C8B-B14F-4D97-AF65-F5344CB8AC3E}">
-        <p14:creationId xmlns:p14="http://schemas.microsoft.com/office/powerpoint/2010/main" val="1139846285"/>
+        <p14:creationId xmlns:p14="http://schemas.microsoft.com/office/powerpoint/2010/main" val="1988058543"/>
       </p:ext>
     </p:extLst>
   </p:cSld>
@@ -9950,10 +8654,10 @@
       </p:grpSpPr>
       <p:sp>
         <p:nvSpPr>
-          <p:cNvPr id="10" name="企画の見どころと公開版の違い">
+          <p:cNvPr id="8" name="企画の見どころと公開版の違い">
             <a:extLst xmlns:a="http://schemas.openxmlformats.org/drawingml/2006/main">
               <a:ext uri="{FF2B5EF4-FFF2-40B4-BE49-F238E27FC236}">
-                <a16:creationId xmlns:a16="http://schemas.microsoft.com/office/drawing/2014/main" id="{54FB057A-6B5C-4983-8B09-DE08CE221DF0}"/>
+                <a16:creationId xmlns:a16="http://schemas.microsoft.com/office/drawing/2014/main" id="{03DA2801-37E5-4E3A-B975-7C9110280766}"/>
               </a:ext>
             </a:extLst>
           </p:cNvPr>
@@ -10115,7 +8819,7 @@
           <p:cNvPr id="2" name="企画上の構想と、試遊できる範囲を分けてご案内します">
             <a:extLst xmlns:a="http://schemas.openxmlformats.org/drawingml/2006/main">
               <a:ext uri="{FF2B5EF4-FFF2-40B4-BE49-F238E27FC236}">
-                <a16:creationId xmlns:a16="http://schemas.microsoft.com/office/drawing/2014/main" id="{F34320FA-C12E-4E20-8E7A-7622BA1C83D2}"/>
+                <a16:creationId xmlns:a16="http://schemas.microsoft.com/office/drawing/2014/main" id="{234FE604-214A-42C3-85D3-DB806926BB4E}"/>
               </a:ext>
             </a:extLst>
           </p:cNvPr>
@@ -10274,334 +8978,10 @@
       </p:sp>
       <p:sp>
         <p:nvSpPr>
-          <p:cNvPr id="3" name="V-Link Battle / 企画書">
+          <p:cNvPr id="3" name="見どころ">
             <a:extLst xmlns:a="http://schemas.openxmlformats.org/drawingml/2006/main">
               <a:ext uri="{FF2B5EF4-FFF2-40B4-BE49-F238E27FC236}">
-                <a16:creationId xmlns:a16="http://schemas.microsoft.com/office/drawing/2014/main" id="{B53A002E-ED4F-45D8-8854-7947B9E5D9BE}"/>
-              </a:ext>
-            </a:extLst>
-          </p:cNvPr>
-          <p:cNvSpPr>
-            <a:spLocks xmlns:a="http://schemas.openxmlformats.org/drawingml/2006/main" noGrp="1"/>
-          </p:cNvSpPr>
-          <p:nvPr/>
-        </p:nvSpPr>
-        <p:spPr>
-          <a:xfrm xmlns:a="http://schemas.openxmlformats.org/drawingml/2006/main">
-            <a:off x="609600" y="6448425"/>
-            <a:ext cx="9525000" cy="247650"/>
-          </a:xfrm>
-          <a:prstGeom xmlns:a="http://schemas.openxmlformats.org/drawingml/2006/main" prst="rect">
-            <a:avLst/>
-          </a:prstGeom>
-          <a:noFill xmlns:a="http://schemas.openxmlformats.org/drawingml/2006/main"/>
-          <a:ln xmlns:a="http://schemas.openxmlformats.org/drawingml/2006/main" w="0">
-            <a:noFill/>
-          </a:ln>
-        </p:spPr>
-        <p:txBody>
-          <a:bodyPr xmlns:a="http://schemas.openxmlformats.org/drawingml/2006/main" wrap="square" lIns="0" tIns="0" rIns="0" bIns="0" anchor="t">
-            <a:noAutofit/>
-          </a:bodyPr>
-          <a:lstStyle xmlns:a="http://schemas.openxmlformats.org/drawingml/2006/main">
-            <a:defPPr>
-              <a:defRPr sz="1200" b="0">
-                <a:solidFill>
-                  <a:srgbClr val="C5BDCE"/>
-                </a:solidFill>
-                <a:latin typeface="Meiryo"/>
-                <a:ea typeface="Meiryo"/>
-                <a:cs typeface="Meiryo"/>
-              </a:defRPr>
-            </a:defPPr>
-            <a:lvl1pPr>
-              <a:defRPr sz="1200" b="0">
-                <a:solidFill>
-                  <a:srgbClr val="C5BDCE"/>
-                </a:solidFill>
-                <a:latin typeface="Meiryo"/>
-                <a:ea typeface="Meiryo"/>
-                <a:cs typeface="Meiryo"/>
-              </a:defRPr>
-            </a:lvl1pPr>
-            <a:lvl2pPr>
-              <a:defRPr sz="1200" b="0">
-                <a:solidFill>
-                  <a:srgbClr val="C5BDCE"/>
-                </a:solidFill>
-                <a:latin typeface="Meiryo"/>
-                <a:ea typeface="Meiryo"/>
-                <a:cs typeface="Meiryo"/>
-              </a:defRPr>
-            </a:lvl2pPr>
-            <a:lvl3pPr>
-              <a:defRPr sz="1200" b="0">
-                <a:solidFill>
-                  <a:srgbClr val="C5BDCE"/>
-                </a:solidFill>
-                <a:latin typeface="Meiryo"/>
-                <a:ea typeface="Meiryo"/>
-                <a:cs typeface="Meiryo"/>
-              </a:defRPr>
-            </a:lvl3pPr>
-            <a:lvl4pPr>
-              <a:defRPr sz="1200" b="0">
-                <a:solidFill>
-                  <a:srgbClr val="C5BDCE"/>
-                </a:solidFill>
-                <a:latin typeface="Meiryo"/>
-                <a:ea typeface="Meiryo"/>
-                <a:cs typeface="Meiryo"/>
-              </a:defRPr>
-            </a:lvl4pPr>
-            <a:lvl5pPr>
-              <a:defRPr sz="1200" b="0">
-                <a:solidFill>
-                  <a:srgbClr val="C5BDCE"/>
-                </a:solidFill>
-                <a:latin typeface="Meiryo"/>
-                <a:ea typeface="Meiryo"/>
-                <a:cs typeface="Meiryo"/>
-              </a:defRPr>
-            </a:lvl5pPr>
-            <a:lvl6pPr>
-              <a:defRPr sz="1200" b="0">
-                <a:solidFill>
-                  <a:srgbClr val="C5BDCE"/>
-                </a:solidFill>
-                <a:latin typeface="Meiryo"/>
-                <a:ea typeface="Meiryo"/>
-                <a:cs typeface="Meiryo"/>
-              </a:defRPr>
-            </a:lvl6pPr>
-            <a:lvl7pPr>
-              <a:defRPr sz="1200" b="0">
-                <a:solidFill>
-                  <a:srgbClr val="C5BDCE"/>
-                </a:solidFill>
-                <a:latin typeface="Meiryo"/>
-                <a:ea typeface="Meiryo"/>
-                <a:cs typeface="Meiryo"/>
-              </a:defRPr>
-            </a:lvl7pPr>
-            <a:lvl8pPr>
-              <a:defRPr sz="1200" b="0">
-                <a:solidFill>
-                  <a:srgbClr val="C5BDCE"/>
-                </a:solidFill>
-                <a:latin typeface="Meiryo"/>
-                <a:ea typeface="Meiryo"/>
-                <a:cs typeface="Meiryo"/>
-              </a:defRPr>
-            </a:lvl8pPr>
-            <a:lvl9pPr>
-              <a:defRPr sz="1200" b="0">
-                <a:solidFill>
-                  <a:srgbClr val="C5BDCE"/>
-                </a:solidFill>
-                <a:latin typeface="Meiryo"/>
-                <a:ea typeface="Meiryo"/>
-                <a:cs typeface="Meiryo"/>
-              </a:defRPr>
-            </a:lvl9pPr>
-          </a:lstStyle>
-          <a:p xmlns:a="http://schemas.openxmlformats.org/drawingml/2006/main">
-            <a:pPr>
-              <a:lnSpc>
-                <a:spcPct val="118000"/>
-              </a:lnSpc>
-              <a:buNone/>
-              <a:defRPr sz="1200" b="0">
-                <a:solidFill>
-                  <a:srgbClr val="C5BDCE"/>
-                </a:solidFill>
-                <a:latin typeface="Meiryo"/>
-                <a:ea typeface="Meiryo"/>
-                <a:cs typeface="Meiryo"/>
-              </a:defRPr>
-            </a:pPr>
-            <a:r>
-              <a:rPr sz="1200" b="0">
-                <a:solidFill>
-                  <a:srgbClr val="C5BDCE"/>
-                </a:solidFill>
-                <a:latin typeface="Meiryo"/>
-                <a:ea typeface="Meiryo"/>
-                <a:cs typeface="Meiryo"/>
-              </a:rPr>
-              <a:t>V-Link Battle / 企画書</a:t>
-            </a:r>
-          </a:p>
-        </p:txBody>
-      </p:sp>
-      <p:sp>
-        <p:nvSpPr>
-          <p:cNvPr id="4" name="05 / 06">
-            <a:extLst xmlns:a="http://schemas.openxmlformats.org/drawingml/2006/main">
-              <a:ext uri="{FF2B5EF4-FFF2-40B4-BE49-F238E27FC236}">
-                <a16:creationId xmlns:a16="http://schemas.microsoft.com/office/drawing/2014/main" id="{E21163F0-CECE-4C57-8313-83221013046D}"/>
-              </a:ext>
-            </a:extLst>
-          </p:cNvPr>
-          <p:cNvSpPr>
-            <a:spLocks xmlns:a="http://schemas.openxmlformats.org/drawingml/2006/main" noGrp="1"/>
-          </p:cNvSpPr>
-          <p:nvPr/>
-        </p:nvSpPr>
-        <p:spPr>
-          <a:xfrm xmlns:a="http://schemas.openxmlformats.org/drawingml/2006/main">
-            <a:off x="10668000" y="6448425"/>
-            <a:ext cx="952500" cy="247650"/>
-          </a:xfrm>
-          <a:prstGeom xmlns:a="http://schemas.openxmlformats.org/drawingml/2006/main" prst="rect">
-            <a:avLst/>
-          </a:prstGeom>
-          <a:noFill xmlns:a="http://schemas.openxmlformats.org/drawingml/2006/main"/>
-          <a:ln xmlns:a="http://schemas.openxmlformats.org/drawingml/2006/main" w="0">
-            <a:noFill/>
-          </a:ln>
-        </p:spPr>
-        <p:txBody>
-          <a:bodyPr xmlns:a="http://schemas.openxmlformats.org/drawingml/2006/main" wrap="square" lIns="0" tIns="0" rIns="0" bIns="0" anchor="t">
-            <a:noAutofit/>
-          </a:bodyPr>
-          <a:lstStyle xmlns:a="http://schemas.openxmlformats.org/drawingml/2006/main">
-            <a:defPPr>
-              <a:defRPr sz="1200" b="0">
-                <a:solidFill>
-                  <a:srgbClr val="C5BDCE"/>
-                </a:solidFill>
-                <a:latin typeface="Meiryo"/>
-                <a:ea typeface="Meiryo"/>
-                <a:cs typeface="Meiryo"/>
-              </a:defRPr>
-            </a:defPPr>
-            <a:lvl1pPr>
-              <a:defRPr sz="1200" b="0">
-                <a:solidFill>
-                  <a:srgbClr val="C5BDCE"/>
-                </a:solidFill>
-                <a:latin typeface="Meiryo"/>
-                <a:ea typeface="Meiryo"/>
-                <a:cs typeface="Meiryo"/>
-              </a:defRPr>
-            </a:lvl1pPr>
-            <a:lvl2pPr>
-              <a:defRPr sz="1200" b="0">
-                <a:solidFill>
-                  <a:srgbClr val="C5BDCE"/>
-                </a:solidFill>
-                <a:latin typeface="Meiryo"/>
-                <a:ea typeface="Meiryo"/>
-                <a:cs typeface="Meiryo"/>
-              </a:defRPr>
-            </a:lvl2pPr>
-            <a:lvl3pPr>
-              <a:defRPr sz="1200" b="0">
-                <a:solidFill>
-                  <a:srgbClr val="C5BDCE"/>
-                </a:solidFill>
-                <a:latin typeface="Meiryo"/>
-                <a:ea typeface="Meiryo"/>
-                <a:cs typeface="Meiryo"/>
-              </a:defRPr>
-            </a:lvl3pPr>
-            <a:lvl4pPr>
-              <a:defRPr sz="1200" b="0">
-                <a:solidFill>
-                  <a:srgbClr val="C5BDCE"/>
-                </a:solidFill>
-                <a:latin typeface="Meiryo"/>
-                <a:ea typeface="Meiryo"/>
-                <a:cs typeface="Meiryo"/>
-              </a:defRPr>
-            </a:lvl4pPr>
-            <a:lvl5pPr>
-              <a:defRPr sz="1200" b="0">
-                <a:solidFill>
-                  <a:srgbClr val="C5BDCE"/>
-                </a:solidFill>
-                <a:latin typeface="Meiryo"/>
-                <a:ea typeface="Meiryo"/>
-                <a:cs typeface="Meiryo"/>
-              </a:defRPr>
-            </a:lvl5pPr>
-            <a:lvl6pPr>
-              <a:defRPr sz="1200" b="0">
-                <a:solidFill>
-                  <a:srgbClr val="C5BDCE"/>
-                </a:solidFill>
-                <a:latin typeface="Meiryo"/>
-                <a:ea typeface="Meiryo"/>
-                <a:cs typeface="Meiryo"/>
-              </a:defRPr>
-            </a:lvl6pPr>
-            <a:lvl7pPr>
-              <a:defRPr sz="1200" b="0">
-                <a:solidFill>
-                  <a:srgbClr val="C5BDCE"/>
-                </a:solidFill>
-                <a:latin typeface="Meiryo"/>
-                <a:ea typeface="Meiryo"/>
-                <a:cs typeface="Meiryo"/>
-              </a:defRPr>
-            </a:lvl7pPr>
-            <a:lvl8pPr>
-              <a:defRPr sz="1200" b="0">
-                <a:solidFill>
-                  <a:srgbClr val="C5BDCE"/>
-                </a:solidFill>
-                <a:latin typeface="Meiryo"/>
-                <a:ea typeface="Meiryo"/>
-                <a:cs typeface="Meiryo"/>
-              </a:defRPr>
-            </a:lvl8pPr>
-            <a:lvl9pPr>
-              <a:defRPr sz="1200" b="0">
-                <a:solidFill>
-                  <a:srgbClr val="C5BDCE"/>
-                </a:solidFill>
-                <a:latin typeface="Meiryo"/>
-                <a:ea typeface="Meiryo"/>
-                <a:cs typeface="Meiryo"/>
-              </a:defRPr>
-            </a:lvl9pPr>
-          </a:lstStyle>
-          <a:p xmlns:a="http://schemas.openxmlformats.org/drawingml/2006/main">
-            <a:pPr>
-              <a:lnSpc>
-                <a:spcPct val="118000"/>
-              </a:lnSpc>
-              <a:buNone/>
-              <a:defRPr sz="1200" b="0">
-                <a:solidFill>
-                  <a:srgbClr val="C5BDCE"/>
-                </a:solidFill>
-                <a:latin typeface="Meiryo"/>
-                <a:ea typeface="Meiryo"/>
-                <a:cs typeface="Meiryo"/>
-              </a:defRPr>
-            </a:pPr>
-            <a:r>
-              <a:rPr sz="1200" b="0">
-                <a:solidFill>
-                  <a:srgbClr val="C5BDCE"/>
-                </a:solidFill>
-                <a:latin typeface="Meiryo"/>
-                <a:ea typeface="Meiryo"/>
-                <a:cs typeface="Meiryo"/>
-              </a:rPr>
-              <a:t>05 / 06</a:t>
-            </a:r>
-          </a:p>
-        </p:txBody>
-      </p:sp>
-      <p:sp>
-        <p:nvSpPr>
-          <p:cNvPr id="5" name="見どころ">
-            <a:extLst xmlns:a="http://schemas.openxmlformats.org/drawingml/2006/main">
-              <a:ext uri="{FF2B5EF4-FFF2-40B4-BE49-F238E27FC236}">
-                <a16:creationId xmlns:a16="http://schemas.microsoft.com/office/drawing/2014/main" id="{7150A0FE-0C8D-429D-AC97-E0A4E72F3770}"/>
+                <a16:creationId xmlns:a16="http://schemas.microsoft.com/office/drawing/2014/main" id="{08B7DC13-ABC0-40C6-AB1C-A8A8A932C941}"/>
               </a:ext>
             </a:extLst>
           </p:cNvPr>
@@ -10760,10 +9140,10 @@
       </p:sp>
       <p:sp>
         <p:nvSpPr>
-          <p:cNvPr id="6" name="配信文化を背景だけでなく、アピールや戦闘中の出来事に結び付けること。&#10;氷">
+          <p:cNvPr id="4" name="配信文化を背景だけでなく、アピールや戦闘中の出来事に結び付けること。&#10;氷">
             <a:extLst xmlns:a="http://schemas.openxmlformats.org/drawingml/2006/main">
               <a:ext uri="{FF2B5EF4-FFF2-40B4-BE49-F238E27FC236}">
-                <a16:creationId xmlns:a16="http://schemas.microsoft.com/office/drawing/2014/main" id="{9DCA575E-2B58-4563-B888-CA1B858DCA48}"/>
+                <a16:creationId xmlns:a16="http://schemas.microsoft.com/office/drawing/2014/main" id="{6441B74F-542A-4A46-8342-322556836657}"/>
               </a:ext>
             </a:extLst>
           </p:cNvPr>
@@ -10949,10 +9329,10 @@
       </p:sp>
       <p:sp>
         <p:nvSpPr>
-          <p:cNvPr id="7" name="Windows版とブラウザー版">
+          <p:cNvPr id="5" name="Windows版とブラウザー版">
             <a:extLst xmlns:a="http://schemas.openxmlformats.org/drawingml/2006/main">
               <a:ext uri="{FF2B5EF4-FFF2-40B4-BE49-F238E27FC236}">
-                <a16:creationId xmlns:a16="http://schemas.microsoft.com/office/drawing/2014/main" id="{BB0801A9-57EF-49B6-B0D4-D578ECDEE213}"/>
+                <a16:creationId xmlns:a16="http://schemas.microsoft.com/office/drawing/2014/main" id="{A8040E56-7803-44C6-A2E8-4F3CA5AC1CD9}"/>
               </a:ext>
             </a:extLst>
           </p:cNvPr>
@@ -11111,10 +9491,10 @@
       </p:sp>
       <p:sp>
         <p:nvSpPr>
-          <p:cNvPr id="8" name="Windows版はOSの別ウィンドウを使う演出に対応。&#10;ブラウザー版はゲ">
+          <p:cNvPr id="6" name="Windows版はOSの別ウィンドウを使う演出に対応。&#10;ブラウザー版はゲ">
             <a:extLst xmlns:a="http://schemas.openxmlformats.org/drawingml/2006/main">
               <a:ext uri="{FF2B5EF4-FFF2-40B4-BE49-F238E27FC236}">
-                <a16:creationId xmlns:a16="http://schemas.microsoft.com/office/drawing/2014/main" id="{F8E03477-AA19-4A8E-B054-EF5BDB819629}"/>
+                <a16:creationId xmlns:a16="http://schemas.microsoft.com/office/drawing/2014/main" id="{AB982BD6-0AD6-483B-BF7F-0D2067F762F9}"/>
               </a:ext>
             </a:extLst>
           </p:cNvPr>
@@ -11300,10 +9680,10 @@
       </p:sp>
       <p:sp>
         <p:nvSpPr>
-          <p:cNvPr id="9" name="企画にある通知・コメントの一部ギミックは、現行ソースで無効になっています">
+          <p:cNvPr id="7" name="企画にある通知・コメントの一部ギミックは、現行ソースで無効になっています">
             <a:extLst xmlns:a="http://schemas.openxmlformats.org/drawingml/2006/main">
               <a:ext uri="{FF2B5EF4-FFF2-40B4-BE49-F238E27FC236}">
-                <a16:creationId xmlns:a16="http://schemas.microsoft.com/office/drawing/2014/main" id="{F90E4123-1727-4C05-9BF0-60B07D74D9CD}"/>
+                <a16:creationId xmlns:a16="http://schemas.microsoft.com/office/drawing/2014/main" id="{2CA0D38B-D991-4CBF-9A2C-D67431B31F35}"/>
               </a:ext>
             </a:extLst>
           </p:cNvPr>
@@ -11490,7 +9870,7 @@
     </p:spTree>
     <p:extLst>
       <p:ext uri="{BB962C8B-B14F-4D97-AF65-F5344CB8AC3E}">
-        <p14:creationId xmlns:p14="http://schemas.microsoft.com/office/powerpoint/2010/main" val="1192804079"/>
+        <p14:creationId xmlns:p14="http://schemas.microsoft.com/office/powerpoint/2010/main" val="1177268202"/>
       </p:ext>
     </p:extLst>
   </p:cSld>
@@ -11518,10 +9898,10 @@
       </p:grpSpPr>
       <p:sp>
         <p:nvSpPr>
-          <p:cNvPr id="11" name="制作体制と作品への入口">
+          <p:cNvPr id="9" name="制作体制と作品への入口">
             <a:extLst xmlns:a="http://schemas.openxmlformats.org/drawingml/2006/main">
               <a:ext uri="{FF2B5EF4-FFF2-40B4-BE49-F238E27FC236}">
-                <a16:creationId xmlns:a16="http://schemas.microsoft.com/office/drawing/2014/main" id="{81A176B3-F542-42BA-BB86-1543BAAC82A0}"/>
+                <a16:creationId xmlns:a16="http://schemas.microsoft.com/office/drawing/2014/main" id="{6B824FF7-A9EB-4CB3-B35F-0E55268FCE5B}"/>
               </a:ext>
             </a:extLst>
           </p:cNvPr>
@@ -11683,7 +10063,7 @@
           <p:cNvPr id="2" name="制作人数：8人 / 開発環境：Unity / PC向け">
             <a:extLst xmlns:a="http://schemas.openxmlformats.org/drawingml/2006/main">
               <a:ext uri="{FF2B5EF4-FFF2-40B4-BE49-F238E27FC236}">
-                <a16:creationId xmlns:a16="http://schemas.microsoft.com/office/drawing/2014/main" id="{6B6D7332-DADA-4F69-86FC-D2D29A0B897B}"/>
+                <a16:creationId xmlns:a16="http://schemas.microsoft.com/office/drawing/2014/main" id="{95790702-2874-464F-878D-6AADDF02B8A9}"/>
               </a:ext>
             </a:extLst>
           </p:cNvPr>
@@ -11842,334 +10222,10 @@
       </p:sp>
       <p:sp>
         <p:nvSpPr>
-          <p:cNvPr id="3" name="V-Link Battle / 企画書">
+          <p:cNvPr id="3" name="私の担当">
             <a:extLst xmlns:a="http://schemas.openxmlformats.org/drawingml/2006/main">
               <a:ext uri="{FF2B5EF4-FFF2-40B4-BE49-F238E27FC236}">
-                <a16:creationId xmlns:a16="http://schemas.microsoft.com/office/drawing/2014/main" id="{0AE2F299-46FF-4E52-925A-38FEC99E3C5E}"/>
-              </a:ext>
-            </a:extLst>
-          </p:cNvPr>
-          <p:cNvSpPr>
-            <a:spLocks xmlns:a="http://schemas.openxmlformats.org/drawingml/2006/main" noGrp="1"/>
-          </p:cNvSpPr>
-          <p:nvPr/>
-        </p:nvSpPr>
-        <p:spPr>
-          <a:xfrm xmlns:a="http://schemas.openxmlformats.org/drawingml/2006/main">
-            <a:off x="609600" y="6448425"/>
-            <a:ext cx="9525000" cy="247650"/>
-          </a:xfrm>
-          <a:prstGeom xmlns:a="http://schemas.openxmlformats.org/drawingml/2006/main" prst="rect">
-            <a:avLst/>
-          </a:prstGeom>
-          <a:noFill xmlns:a="http://schemas.openxmlformats.org/drawingml/2006/main"/>
-          <a:ln xmlns:a="http://schemas.openxmlformats.org/drawingml/2006/main" w="0">
-            <a:noFill/>
-          </a:ln>
-        </p:spPr>
-        <p:txBody>
-          <a:bodyPr xmlns:a="http://schemas.openxmlformats.org/drawingml/2006/main" wrap="square" lIns="0" tIns="0" rIns="0" bIns="0" anchor="t">
-            <a:noAutofit/>
-          </a:bodyPr>
-          <a:lstStyle xmlns:a="http://schemas.openxmlformats.org/drawingml/2006/main">
-            <a:defPPr>
-              <a:defRPr sz="1200" b="0">
-                <a:solidFill>
-                  <a:srgbClr val="C5BDCE"/>
-                </a:solidFill>
-                <a:latin typeface="Meiryo"/>
-                <a:ea typeface="Meiryo"/>
-                <a:cs typeface="Meiryo"/>
-              </a:defRPr>
-            </a:defPPr>
-            <a:lvl1pPr>
-              <a:defRPr sz="1200" b="0">
-                <a:solidFill>
-                  <a:srgbClr val="C5BDCE"/>
-                </a:solidFill>
-                <a:latin typeface="Meiryo"/>
-                <a:ea typeface="Meiryo"/>
-                <a:cs typeface="Meiryo"/>
-              </a:defRPr>
-            </a:lvl1pPr>
-            <a:lvl2pPr>
-              <a:defRPr sz="1200" b="0">
-                <a:solidFill>
-                  <a:srgbClr val="C5BDCE"/>
-                </a:solidFill>
-                <a:latin typeface="Meiryo"/>
-                <a:ea typeface="Meiryo"/>
-                <a:cs typeface="Meiryo"/>
-              </a:defRPr>
-            </a:lvl2pPr>
-            <a:lvl3pPr>
-              <a:defRPr sz="1200" b="0">
-                <a:solidFill>
-                  <a:srgbClr val="C5BDCE"/>
-                </a:solidFill>
-                <a:latin typeface="Meiryo"/>
-                <a:ea typeface="Meiryo"/>
-                <a:cs typeface="Meiryo"/>
-              </a:defRPr>
-            </a:lvl3pPr>
-            <a:lvl4pPr>
-              <a:defRPr sz="1200" b="0">
-                <a:solidFill>
-                  <a:srgbClr val="C5BDCE"/>
-                </a:solidFill>
-                <a:latin typeface="Meiryo"/>
-                <a:ea typeface="Meiryo"/>
-                <a:cs typeface="Meiryo"/>
-              </a:defRPr>
-            </a:lvl4pPr>
-            <a:lvl5pPr>
-              <a:defRPr sz="1200" b="0">
-                <a:solidFill>
-                  <a:srgbClr val="C5BDCE"/>
-                </a:solidFill>
-                <a:latin typeface="Meiryo"/>
-                <a:ea typeface="Meiryo"/>
-                <a:cs typeface="Meiryo"/>
-              </a:defRPr>
-            </a:lvl5pPr>
-            <a:lvl6pPr>
-              <a:defRPr sz="1200" b="0">
-                <a:solidFill>
-                  <a:srgbClr val="C5BDCE"/>
-                </a:solidFill>
-                <a:latin typeface="Meiryo"/>
-                <a:ea typeface="Meiryo"/>
-                <a:cs typeface="Meiryo"/>
-              </a:defRPr>
-            </a:lvl6pPr>
-            <a:lvl7pPr>
-              <a:defRPr sz="1200" b="0">
-                <a:solidFill>
-                  <a:srgbClr val="C5BDCE"/>
-                </a:solidFill>
-                <a:latin typeface="Meiryo"/>
-                <a:ea typeface="Meiryo"/>
-                <a:cs typeface="Meiryo"/>
-              </a:defRPr>
-            </a:lvl7pPr>
-            <a:lvl8pPr>
-              <a:defRPr sz="1200" b="0">
-                <a:solidFill>
-                  <a:srgbClr val="C5BDCE"/>
-                </a:solidFill>
-                <a:latin typeface="Meiryo"/>
-                <a:ea typeface="Meiryo"/>
-                <a:cs typeface="Meiryo"/>
-              </a:defRPr>
-            </a:lvl8pPr>
-            <a:lvl9pPr>
-              <a:defRPr sz="1200" b="0">
-                <a:solidFill>
-                  <a:srgbClr val="C5BDCE"/>
-                </a:solidFill>
-                <a:latin typeface="Meiryo"/>
-                <a:ea typeface="Meiryo"/>
-                <a:cs typeface="Meiryo"/>
-              </a:defRPr>
-            </a:lvl9pPr>
-          </a:lstStyle>
-          <a:p xmlns:a="http://schemas.openxmlformats.org/drawingml/2006/main">
-            <a:pPr>
-              <a:lnSpc>
-                <a:spcPct val="118000"/>
-              </a:lnSpc>
-              <a:buNone/>
-              <a:defRPr sz="1200" b="0">
-                <a:solidFill>
-                  <a:srgbClr val="C5BDCE"/>
-                </a:solidFill>
-                <a:latin typeface="Meiryo"/>
-                <a:ea typeface="Meiryo"/>
-                <a:cs typeface="Meiryo"/>
-              </a:defRPr>
-            </a:pPr>
-            <a:r>
-              <a:rPr sz="1200" b="0">
-                <a:solidFill>
-                  <a:srgbClr val="C5BDCE"/>
-                </a:solidFill>
-                <a:latin typeface="Meiryo"/>
-                <a:ea typeface="Meiryo"/>
-                <a:cs typeface="Meiryo"/>
-              </a:rPr>
-              <a:t>V-Link Battle / 企画書</a:t>
-            </a:r>
-          </a:p>
-        </p:txBody>
-      </p:sp>
-      <p:sp>
-        <p:nvSpPr>
-          <p:cNvPr id="4" name="06 / 06">
-            <a:extLst xmlns:a="http://schemas.openxmlformats.org/drawingml/2006/main">
-              <a:ext uri="{FF2B5EF4-FFF2-40B4-BE49-F238E27FC236}">
-                <a16:creationId xmlns:a16="http://schemas.microsoft.com/office/drawing/2014/main" id="{03312444-2A74-4320-A7D6-C505DB58F052}"/>
-              </a:ext>
-            </a:extLst>
-          </p:cNvPr>
-          <p:cNvSpPr>
-            <a:spLocks xmlns:a="http://schemas.openxmlformats.org/drawingml/2006/main" noGrp="1"/>
-          </p:cNvSpPr>
-          <p:nvPr/>
-        </p:nvSpPr>
-        <p:spPr>
-          <a:xfrm xmlns:a="http://schemas.openxmlformats.org/drawingml/2006/main">
-            <a:off x="10668000" y="6448425"/>
-            <a:ext cx="952500" cy="247650"/>
-          </a:xfrm>
-          <a:prstGeom xmlns:a="http://schemas.openxmlformats.org/drawingml/2006/main" prst="rect">
-            <a:avLst/>
-          </a:prstGeom>
-          <a:noFill xmlns:a="http://schemas.openxmlformats.org/drawingml/2006/main"/>
-          <a:ln xmlns:a="http://schemas.openxmlformats.org/drawingml/2006/main" w="0">
-            <a:noFill/>
-          </a:ln>
-        </p:spPr>
-        <p:txBody>
-          <a:bodyPr xmlns:a="http://schemas.openxmlformats.org/drawingml/2006/main" wrap="square" lIns="0" tIns="0" rIns="0" bIns="0" anchor="t">
-            <a:noAutofit/>
-          </a:bodyPr>
-          <a:lstStyle xmlns:a="http://schemas.openxmlformats.org/drawingml/2006/main">
-            <a:defPPr>
-              <a:defRPr sz="1200" b="0">
-                <a:solidFill>
-                  <a:srgbClr val="C5BDCE"/>
-                </a:solidFill>
-                <a:latin typeface="Meiryo"/>
-                <a:ea typeface="Meiryo"/>
-                <a:cs typeface="Meiryo"/>
-              </a:defRPr>
-            </a:defPPr>
-            <a:lvl1pPr>
-              <a:defRPr sz="1200" b="0">
-                <a:solidFill>
-                  <a:srgbClr val="C5BDCE"/>
-                </a:solidFill>
-                <a:latin typeface="Meiryo"/>
-                <a:ea typeface="Meiryo"/>
-                <a:cs typeface="Meiryo"/>
-              </a:defRPr>
-            </a:lvl1pPr>
-            <a:lvl2pPr>
-              <a:defRPr sz="1200" b="0">
-                <a:solidFill>
-                  <a:srgbClr val="C5BDCE"/>
-                </a:solidFill>
-                <a:latin typeface="Meiryo"/>
-                <a:ea typeface="Meiryo"/>
-                <a:cs typeface="Meiryo"/>
-              </a:defRPr>
-            </a:lvl2pPr>
-            <a:lvl3pPr>
-              <a:defRPr sz="1200" b="0">
-                <a:solidFill>
-                  <a:srgbClr val="C5BDCE"/>
-                </a:solidFill>
-                <a:latin typeface="Meiryo"/>
-                <a:ea typeface="Meiryo"/>
-                <a:cs typeface="Meiryo"/>
-              </a:defRPr>
-            </a:lvl3pPr>
-            <a:lvl4pPr>
-              <a:defRPr sz="1200" b="0">
-                <a:solidFill>
-                  <a:srgbClr val="C5BDCE"/>
-                </a:solidFill>
-                <a:latin typeface="Meiryo"/>
-                <a:ea typeface="Meiryo"/>
-                <a:cs typeface="Meiryo"/>
-              </a:defRPr>
-            </a:lvl4pPr>
-            <a:lvl5pPr>
-              <a:defRPr sz="1200" b="0">
-                <a:solidFill>
-                  <a:srgbClr val="C5BDCE"/>
-                </a:solidFill>
-                <a:latin typeface="Meiryo"/>
-                <a:ea typeface="Meiryo"/>
-                <a:cs typeface="Meiryo"/>
-              </a:defRPr>
-            </a:lvl5pPr>
-            <a:lvl6pPr>
-              <a:defRPr sz="1200" b="0">
-                <a:solidFill>
-                  <a:srgbClr val="C5BDCE"/>
-                </a:solidFill>
-                <a:latin typeface="Meiryo"/>
-                <a:ea typeface="Meiryo"/>
-                <a:cs typeface="Meiryo"/>
-              </a:defRPr>
-            </a:lvl6pPr>
-            <a:lvl7pPr>
-              <a:defRPr sz="1200" b="0">
-                <a:solidFill>
-                  <a:srgbClr val="C5BDCE"/>
-                </a:solidFill>
-                <a:latin typeface="Meiryo"/>
-                <a:ea typeface="Meiryo"/>
-                <a:cs typeface="Meiryo"/>
-              </a:defRPr>
-            </a:lvl7pPr>
-            <a:lvl8pPr>
-              <a:defRPr sz="1200" b="0">
-                <a:solidFill>
-                  <a:srgbClr val="C5BDCE"/>
-                </a:solidFill>
-                <a:latin typeface="Meiryo"/>
-                <a:ea typeface="Meiryo"/>
-                <a:cs typeface="Meiryo"/>
-              </a:defRPr>
-            </a:lvl8pPr>
-            <a:lvl9pPr>
-              <a:defRPr sz="1200" b="0">
-                <a:solidFill>
-                  <a:srgbClr val="C5BDCE"/>
-                </a:solidFill>
-                <a:latin typeface="Meiryo"/>
-                <a:ea typeface="Meiryo"/>
-                <a:cs typeface="Meiryo"/>
-              </a:defRPr>
-            </a:lvl9pPr>
-          </a:lstStyle>
-          <a:p xmlns:a="http://schemas.openxmlformats.org/drawingml/2006/main">
-            <a:pPr>
-              <a:lnSpc>
-                <a:spcPct val="118000"/>
-              </a:lnSpc>
-              <a:buNone/>
-              <a:defRPr sz="1200" b="0">
-                <a:solidFill>
-                  <a:srgbClr val="C5BDCE"/>
-                </a:solidFill>
-                <a:latin typeface="Meiryo"/>
-                <a:ea typeface="Meiryo"/>
-                <a:cs typeface="Meiryo"/>
-              </a:defRPr>
-            </a:pPr>
-            <a:r>
-              <a:rPr sz="1200" b="0">
-                <a:solidFill>
-                  <a:srgbClr val="C5BDCE"/>
-                </a:solidFill>
-                <a:latin typeface="Meiryo"/>
-                <a:ea typeface="Meiryo"/>
-                <a:cs typeface="Meiryo"/>
-              </a:rPr>
-              <a:t>06 / 06</a:t>
-            </a:r>
-          </a:p>
-        </p:txBody>
-      </p:sp>
-      <p:sp>
-        <p:nvSpPr>
-          <p:cNvPr id="5" name="私の担当">
-            <a:extLst xmlns:a="http://schemas.openxmlformats.org/drawingml/2006/main">
-              <a:ext uri="{FF2B5EF4-FFF2-40B4-BE49-F238E27FC236}">
-                <a16:creationId xmlns:a16="http://schemas.microsoft.com/office/drawing/2014/main" id="{651A5AAB-FA66-45C2-8758-713E214F2DCB}"/>
+                <a16:creationId xmlns:a16="http://schemas.microsoft.com/office/drawing/2014/main" id="{0F04175D-2295-43EF-B142-9C3B81ADDB8D}"/>
               </a:ext>
             </a:extLst>
           </p:cNvPr>
@@ -12328,10 +10384,10 @@
       </p:sp>
       <p:sp>
         <p:nvSpPr>
-          <p:cNvPr id="6" name="企画・仕様整理・システム設計・タスク振り分け。&#10;素材集め、3Dオブジェク">
+          <p:cNvPr id="4" name="企画・仕様整理・システム設計・タスク振り分け。&#10;素材集め、3Dオブジェク">
             <a:extLst xmlns:a="http://schemas.openxmlformats.org/drawingml/2006/main">
               <a:ext uri="{FF2B5EF4-FFF2-40B4-BE49-F238E27FC236}">
-                <a16:creationId xmlns:a16="http://schemas.microsoft.com/office/drawing/2014/main" id="{96A1943A-C4F1-4C03-85B0-3C72072AEEA4}"/>
+                <a16:creationId xmlns:a16="http://schemas.microsoft.com/office/drawing/2014/main" id="{C7A32A86-65BB-4462-B2A2-6FEA99178E35}"/>
               </a:ext>
             </a:extLst>
           </p:cNvPr>
@@ -12517,10 +10573,10 @@
       </p:sp>
       <p:sp>
         <p:nvSpPr>
-          <p:cNvPr id="7" name="配信文化のどの要素を遊びにするか整理し、制作へつなげました。">
+          <p:cNvPr id="5" name="配信文化のどの要素を遊びにするか整理し、制作へつなげました。">
             <a:extLst xmlns:a="http://schemas.openxmlformats.org/drawingml/2006/main">
               <a:ext uri="{FF2B5EF4-FFF2-40B4-BE49-F238E27FC236}">
-                <a16:creationId xmlns:a16="http://schemas.microsoft.com/office/drawing/2014/main" id="{2731A202-A2D4-4AC3-ADDF-BD0A626375B1}"/>
+                <a16:creationId xmlns:a16="http://schemas.microsoft.com/office/drawing/2014/main" id="{AEAD067B-3179-4508-8E0B-33AC43C8F28E}"/>
               </a:ext>
             </a:extLst>
           </p:cNvPr>
@@ -12679,10 +10735,10 @@
       </p:sp>
       <p:sp>
         <p:nvSpPr>
-          <p:cNvPr id="8" name="ブラウザー版をプレイ">
+          <p:cNvPr id="6" name="ブラウザー版をプレイ">
             <a:extLst xmlns:a="http://schemas.openxmlformats.org/drawingml/2006/main">
               <a:ext uri="{FF2B5EF4-FFF2-40B4-BE49-F238E27FC236}">
-                <a16:creationId xmlns:a16="http://schemas.microsoft.com/office/drawing/2014/main" id="{E0FFE22E-2040-44DF-88F9-B23B6F791925}"/>
+                <a16:creationId xmlns:a16="http://schemas.microsoft.com/office/drawing/2014/main" id="{7460748E-5521-483B-A632-93D6418ECC1A}"/>
               </a:ext>
             </a:extLst>
           </p:cNvPr>
@@ -12833,7 +10889,7 @@
                 <a:latin typeface="Meiryo"/>
                 <a:ea typeface="Meiryo"/>
                 <a:cs typeface="Meiryo"/>
-                <a:hlinkClick xmlns:r="http://schemas.openxmlformats.org/officeDocument/2006/relationships" r:id="R10ad3dcdbd5f40f7"/>
+                <a:hlinkClick xmlns:r="http://schemas.openxmlformats.org/officeDocument/2006/relationships" r:id="Ra2358bf47c3f49bd"/>
               </a:rPr>
               <a:t>ブラウザー版をプレイ</a:t>
             </a:r>
@@ -12842,10 +10898,10 @@
       </p:sp>
       <p:sp>
         <p:nvSpPr>
-          <p:cNvPr id="9" name="Windows版・プレイ映像を見る">
+          <p:cNvPr id="7" name="Windows版・プレイ映像を見る">
             <a:extLst xmlns:a="http://schemas.openxmlformats.org/drawingml/2006/main">
               <a:ext uri="{FF2B5EF4-FFF2-40B4-BE49-F238E27FC236}">
-                <a16:creationId xmlns:a16="http://schemas.microsoft.com/office/drawing/2014/main" id="{64CCA464-32E0-481F-9B15-499567A14C16}"/>
+                <a16:creationId xmlns:a16="http://schemas.microsoft.com/office/drawing/2014/main" id="{C7A3A8F7-CE8D-4061-B8EA-09CE55CC0C8C}"/>
               </a:ext>
             </a:extLst>
           </p:cNvPr>
@@ -12996,7 +11052,7 @@
                 <a:latin typeface="Meiryo"/>
                 <a:ea typeface="Meiryo"/>
                 <a:cs typeface="Meiryo"/>
-                <a:hlinkClick xmlns:r="http://schemas.openxmlformats.org/officeDocument/2006/relationships" r:id="Rbb1841ed5a274097"/>
+                <a:hlinkClick xmlns:r="http://schemas.openxmlformats.org/officeDocument/2006/relationships" r:id="R2695f222f98e4eb3"/>
               </a:rPr>
               <a:t>Windows版・プレイ映像を見る</a:t>
             </a:r>
@@ -13005,10 +11061,10 @@
       </p:sp>
       <p:sp>
         <p:nvSpPr>
-          <p:cNvPr id="10" name="実行ファイルを利用できない環境にも、ブラウザー版と映像を用意しています。">
+          <p:cNvPr id="8" name="実行ファイルを利用できない環境にも、ブラウザー版と映像を用意しています。">
             <a:extLst xmlns:a="http://schemas.openxmlformats.org/drawingml/2006/main">
               <a:ext uri="{FF2B5EF4-FFF2-40B4-BE49-F238E27FC236}">
-                <a16:creationId xmlns:a16="http://schemas.microsoft.com/office/drawing/2014/main" id="{07B3637F-86F0-403E-AF33-4BDCDE0D6E49}"/>
+                <a16:creationId xmlns:a16="http://schemas.microsoft.com/office/drawing/2014/main" id="{CA00C705-31AB-40EB-8897-F39269CC6531}"/>
               </a:ext>
             </a:extLst>
           </p:cNvPr>
@@ -13195,7 +11251,7 @@
     </p:spTree>
     <p:extLst>
       <p:ext uri="{BB962C8B-B14F-4D97-AF65-F5344CB8AC3E}">
-        <p14:creationId xmlns:p14="http://schemas.microsoft.com/office/powerpoint/2010/main" val="953504376"/>
+        <p14:creationId xmlns:p14="http://schemas.microsoft.com/office/powerpoint/2010/main" val="1057661214"/>
       </p:ext>
     </p:extLst>
   </p:cSld>
